--- a/Doc Slide/Enhanced Automated Construction Quantity Takeoff.pptx
+++ b/Doc Slide/Enhanced Automated Construction Quantity Takeoff.pptx
@@ -5665,10 +5665,34 @@
         <a:lstStyle/>
         <a:p>
           <a:r>
-            <a:rPr lang="es-AR"/>
-            <a:t>Permettre à  GTP-4o de raisonner étape par étapes</a:t>
+            <a:rPr lang="es-AR" dirty="0" err="1"/>
+            <a:t>Permettre</a:t>
           </a:r>
-          <a:endParaRPr lang="en-US"/>
+          <a:r>
+            <a:rPr lang="es-AR" dirty="0"/>
+            <a:t> à  GTP-4o de </a:t>
+          </a:r>
+          <a:r>
+            <a:rPr lang="es-AR" dirty="0" err="1"/>
+            <a:t>raisonner</a:t>
+          </a:r>
+          <a:r>
+            <a:rPr lang="es-AR" dirty="0"/>
+            <a:t> </a:t>
+          </a:r>
+          <a:r>
+            <a:rPr lang="es-AR" dirty="0" err="1"/>
+            <a:t>étape</a:t>
+          </a:r>
+          <a:r>
+            <a:rPr lang="es-AR" dirty="0"/>
+            <a:t> par </a:t>
+          </a:r>
+          <a:r>
+            <a:rPr lang="es-AR" dirty="0" err="1"/>
+            <a:t>étapes</a:t>
+          </a:r>
+          <a:endParaRPr lang="en-US" dirty="0"/>
         </a:p>
       </dgm:t>
     </dgm:pt>
@@ -5702,10 +5726,42 @@
         <a:lstStyle/>
         <a:p>
           <a:r>
-            <a:rPr lang="es-AR"/>
-            <a:t>Relier les régles de calcul, les variable et  les valeurs extraites</a:t>
+            <a:rPr lang="es-AR" dirty="0" err="1"/>
+            <a:t>Relier</a:t>
           </a:r>
-          <a:endParaRPr lang="en-US"/>
+          <a:r>
+            <a:rPr lang="es-AR" dirty="0"/>
+            <a:t> les </a:t>
+          </a:r>
+          <a:r>
+            <a:rPr lang="es-AR" dirty="0" err="1"/>
+            <a:t>régles</a:t>
+          </a:r>
+          <a:r>
+            <a:rPr lang="es-AR" dirty="0"/>
+            <a:t> de </a:t>
+          </a:r>
+          <a:r>
+            <a:rPr lang="es-AR" dirty="0" err="1"/>
+            <a:t>calcul</a:t>
+          </a:r>
+          <a:r>
+            <a:rPr lang="es-AR" dirty="0"/>
+            <a:t>, les variable et  les </a:t>
+          </a:r>
+          <a:r>
+            <a:rPr lang="es-AR" dirty="0" err="1"/>
+            <a:t>valeurs</a:t>
+          </a:r>
+          <a:r>
+            <a:rPr lang="es-AR" dirty="0"/>
+            <a:t> </a:t>
+          </a:r>
+          <a:r>
+            <a:rPr lang="es-AR" dirty="0" err="1"/>
+            <a:t>extraites</a:t>
+          </a:r>
+          <a:endParaRPr lang="en-US" dirty="0"/>
         </a:p>
       </dgm:t>
     </dgm:pt>
@@ -6064,7 +6120,7 @@
   <dgm:whole/>
   <dgm:extLst>
     <a:ext uri="http://schemas.microsoft.com/office/drawing/2008/diagram">
-      <dsp:dataModelExt xmlns:dsp="http://schemas.microsoft.com/office/drawing/2008/diagram" relId="rId6" minVer="http://schemas.openxmlformats.org/drawingml/2006/diagram"/>
+      <dsp:dataModelExt xmlns:dsp="http://schemas.microsoft.com/office/drawing/2008/diagram" relId="rId7" minVer="http://schemas.openxmlformats.org/drawingml/2006/diagram"/>
     </a:ext>
   </dgm:extLst>
 </dgm:dataModel>
@@ -7654,10 +7710,34 @@
             <a:buChar char="•"/>
           </a:pPr>
           <a:r>
-            <a:rPr lang="es-AR" sz="2000" kern="1200"/>
-            <a:t>Permettre à  GTP-4o de raisonner étape par étapes</a:t>
+            <a:rPr lang="es-AR" sz="2000" kern="1200" dirty="0" err="1"/>
+            <a:t>Permettre</a:t>
           </a:r>
-          <a:endParaRPr lang="en-US" sz="2000" kern="1200"/>
+          <a:r>
+            <a:rPr lang="es-AR" sz="2000" kern="1200" dirty="0"/>
+            <a:t> à  GTP-4o de </a:t>
+          </a:r>
+          <a:r>
+            <a:rPr lang="es-AR" sz="2000" kern="1200" dirty="0" err="1"/>
+            <a:t>raisonner</a:t>
+          </a:r>
+          <a:r>
+            <a:rPr lang="es-AR" sz="2000" kern="1200" dirty="0"/>
+            <a:t> </a:t>
+          </a:r>
+          <a:r>
+            <a:rPr lang="es-AR" sz="2000" kern="1200" dirty="0" err="1"/>
+            <a:t>étape</a:t>
+          </a:r>
+          <a:r>
+            <a:rPr lang="es-AR" sz="2000" kern="1200" dirty="0"/>
+            <a:t> par </a:t>
+          </a:r>
+          <a:r>
+            <a:rPr lang="es-AR" sz="2000" kern="1200" dirty="0" err="1"/>
+            <a:t>étapes</a:t>
+          </a:r>
+          <a:endParaRPr lang="en-US" sz="2000" kern="1200" dirty="0"/>
         </a:p>
         <a:p>
           <a:pPr marL="228600" lvl="1" indent="-228600" algn="l" defTabSz="889000">
@@ -7673,10 +7753,42 @@
             <a:buChar char="•"/>
           </a:pPr>
           <a:r>
-            <a:rPr lang="es-AR" sz="2000" kern="1200"/>
-            <a:t>Relier les régles de calcul, les variable et  les valeurs extraites</a:t>
+            <a:rPr lang="es-AR" sz="2000" kern="1200" dirty="0" err="1"/>
+            <a:t>Relier</a:t>
           </a:r>
-          <a:endParaRPr lang="en-US" sz="2000" kern="1200"/>
+          <a:r>
+            <a:rPr lang="es-AR" sz="2000" kern="1200" dirty="0"/>
+            <a:t> les </a:t>
+          </a:r>
+          <a:r>
+            <a:rPr lang="es-AR" sz="2000" kern="1200" dirty="0" err="1"/>
+            <a:t>régles</a:t>
+          </a:r>
+          <a:r>
+            <a:rPr lang="es-AR" sz="2000" kern="1200" dirty="0"/>
+            <a:t> de </a:t>
+          </a:r>
+          <a:r>
+            <a:rPr lang="es-AR" sz="2000" kern="1200" dirty="0" err="1"/>
+            <a:t>calcul</a:t>
+          </a:r>
+          <a:r>
+            <a:rPr lang="es-AR" sz="2000" kern="1200" dirty="0"/>
+            <a:t>, les variable et  les </a:t>
+          </a:r>
+          <a:r>
+            <a:rPr lang="es-AR" sz="2000" kern="1200" dirty="0" err="1"/>
+            <a:t>valeurs</a:t>
+          </a:r>
+          <a:r>
+            <a:rPr lang="es-AR" sz="2000" kern="1200" dirty="0"/>
+            <a:t> </a:t>
+          </a:r>
+          <a:r>
+            <a:rPr lang="es-AR" sz="2000" kern="1200" dirty="0" err="1"/>
+            <a:t>extraites</a:t>
+          </a:r>
+          <a:endParaRPr lang="en-US" sz="2000" kern="1200" dirty="0"/>
         </a:p>
         <a:p>
           <a:pPr marL="228600" lvl="1" indent="-228600" algn="l" defTabSz="889000">
@@ -14715,7 +14827,7 @@
           <a:p>
             <a:fld id="{127824B3-DC8C-4FD9-B3F9-F8C5DB33BA10}" type="datetimeFigureOut">
               <a:rPr lang="es-AR" smtClean="0"/>
-              <a:t>6/10/2025</a:t>
+              <a:t>7/10/2025</a:t>
             </a:fld>
             <a:endParaRPr lang="es-AR"/>
           </a:p>
@@ -15233,6 +15345,258 @@
 </p:notes>
 </file>
 
+<file path=ppt/notesSlides/notesSlide3.xml><?xml version="1.0" encoding="utf-8"?>
+<p:notes xmlns:a="http://schemas.openxmlformats.org/drawingml/2006/main" xmlns:r="http://schemas.openxmlformats.org/officeDocument/2006/relationships" xmlns:p="http://schemas.openxmlformats.org/presentationml/2006/main">
+  <p:cSld>
+    <p:spTree>
+      <p:nvGrpSpPr>
+        <p:cNvPr id="1" name=""/>
+        <p:cNvGrpSpPr/>
+        <p:nvPr/>
+      </p:nvGrpSpPr>
+      <p:grpSpPr>
+        <a:xfrm>
+          <a:off x="0" y="0"/>
+          <a:ext cx="0" cy="0"/>
+          <a:chOff x="0" y="0"/>
+          <a:chExt cx="0" cy="0"/>
+        </a:xfrm>
+      </p:grpSpPr>
+      <p:sp>
+        <p:nvSpPr>
+          <p:cNvPr id="2" name="Espace réservé de l'image des diapositives 1"/>
+          <p:cNvSpPr>
+            <a:spLocks noGrp="1" noRot="1" noChangeAspect="1"/>
+          </p:cNvSpPr>
+          <p:nvPr>
+            <p:ph type="sldImg"/>
+          </p:nvPr>
+        </p:nvSpPr>
+        <p:spPr/>
+      </p:sp>
+      <p:sp>
+        <p:nvSpPr>
+          <p:cNvPr id="3" name="Espace réservé des notes 2"/>
+          <p:cNvSpPr>
+            <a:spLocks noGrp="1"/>
+          </p:cNvSpPr>
+          <p:nvPr>
+            <p:ph type="body" idx="1"/>
+          </p:nvPr>
+        </p:nvSpPr>
+        <p:spPr/>
+        <p:txBody>
+          <a:bodyPr/>
+          <a:lstStyle/>
+          <a:p>
+            <a:endParaRPr lang="es-AR" dirty="0"/>
+          </a:p>
+        </p:txBody>
+      </p:sp>
+      <p:sp>
+        <p:nvSpPr>
+          <p:cNvPr id="4" name="Espace réservé du numéro de diapositive 3"/>
+          <p:cNvSpPr>
+            <a:spLocks noGrp="1"/>
+          </p:cNvSpPr>
+          <p:nvPr>
+            <p:ph type="sldNum" sz="quarter" idx="5"/>
+          </p:nvPr>
+        </p:nvSpPr>
+        <p:spPr/>
+        <p:txBody>
+          <a:bodyPr/>
+          <a:lstStyle/>
+          <a:p>
+            <a:fld id="{300B6AC0-7D31-4FAF-A754-AE5D0A178719}" type="slidenum">
+              <a:rPr lang="es-AR" smtClean="0"/>
+              <a:t>9</a:t>
+            </a:fld>
+            <a:endParaRPr lang="es-AR"/>
+          </a:p>
+        </p:txBody>
+      </p:sp>
+    </p:spTree>
+    <p:extLst>
+      <p:ext uri="{BB962C8B-B14F-4D97-AF65-F5344CB8AC3E}">
+        <p14:creationId xmlns:p14="http://schemas.microsoft.com/office/powerpoint/2010/main" val="30939271"/>
+      </p:ext>
+    </p:extLst>
+  </p:cSld>
+  <p:clrMapOvr>
+    <a:masterClrMapping/>
+  </p:clrMapOvr>
+</p:notes>
+</file>
+
+<file path=ppt/notesSlides/notesSlide4.xml><?xml version="1.0" encoding="utf-8"?>
+<p:notes xmlns:a="http://schemas.openxmlformats.org/drawingml/2006/main" xmlns:r="http://schemas.openxmlformats.org/officeDocument/2006/relationships" xmlns:p="http://schemas.openxmlformats.org/presentationml/2006/main">
+  <p:cSld>
+    <p:spTree>
+      <p:nvGrpSpPr>
+        <p:cNvPr id="1" name=""/>
+        <p:cNvGrpSpPr/>
+        <p:nvPr/>
+      </p:nvGrpSpPr>
+      <p:grpSpPr>
+        <a:xfrm>
+          <a:off x="0" y="0"/>
+          <a:ext cx="0" cy="0"/>
+          <a:chOff x="0" y="0"/>
+          <a:chExt cx="0" cy="0"/>
+        </a:xfrm>
+      </p:grpSpPr>
+      <p:sp>
+        <p:nvSpPr>
+          <p:cNvPr id="2" name="Espace réservé de l'image des diapositives 1"/>
+          <p:cNvSpPr>
+            <a:spLocks noGrp="1" noRot="1" noChangeAspect="1"/>
+          </p:cNvSpPr>
+          <p:nvPr>
+            <p:ph type="sldImg"/>
+          </p:nvPr>
+        </p:nvSpPr>
+        <p:spPr/>
+      </p:sp>
+      <p:sp>
+        <p:nvSpPr>
+          <p:cNvPr id="3" name="Espace réservé des notes 2"/>
+          <p:cNvSpPr>
+            <a:spLocks noGrp="1"/>
+          </p:cNvSpPr>
+          <p:nvPr>
+            <p:ph type="body" idx="1"/>
+          </p:nvPr>
+        </p:nvSpPr>
+        <p:spPr/>
+        <p:txBody>
+          <a:bodyPr/>
+          <a:lstStyle/>
+          <a:p>
+            <a:endParaRPr lang="es-AR" dirty="0"/>
+          </a:p>
+        </p:txBody>
+      </p:sp>
+      <p:sp>
+        <p:nvSpPr>
+          <p:cNvPr id="4" name="Espace réservé du numéro de diapositive 3"/>
+          <p:cNvSpPr>
+            <a:spLocks noGrp="1"/>
+          </p:cNvSpPr>
+          <p:nvPr>
+            <p:ph type="sldNum" sz="quarter" idx="5"/>
+          </p:nvPr>
+        </p:nvSpPr>
+        <p:spPr/>
+        <p:txBody>
+          <a:bodyPr/>
+          <a:lstStyle/>
+          <a:p>
+            <a:fld id="{300B6AC0-7D31-4FAF-A754-AE5D0A178719}" type="slidenum">
+              <a:rPr lang="es-AR" smtClean="0"/>
+              <a:t>13</a:t>
+            </a:fld>
+            <a:endParaRPr lang="es-AR"/>
+          </a:p>
+        </p:txBody>
+      </p:sp>
+    </p:spTree>
+    <p:extLst>
+      <p:ext uri="{BB962C8B-B14F-4D97-AF65-F5344CB8AC3E}">
+        <p14:creationId xmlns:p14="http://schemas.microsoft.com/office/powerpoint/2010/main" val="1857783690"/>
+      </p:ext>
+    </p:extLst>
+  </p:cSld>
+  <p:clrMapOvr>
+    <a:masterClrMapping/>
+  </p:clrMapOvr>
+</p:notes>
+</file>
+
+<file path=ppt/notesSlides/notesSlide5.xml><?xml version="1.0" encoding="utf-8"?>
+<p:notes xmlns:a="http://schemas.openxmlformats.org/drawingml/2006/main" xmlns:r="http://schemas.openxmlformats.org/officeDocument/2006/relationships" xmlns:p="http://schemas.openxmlformats.org/presentationml/2006/main">
+  <p:cSld>
+    <p:spTree>
+      <p:nvGrpSpPr>
+        <p:cNvPr id="1" name=""/>
+        <p:cNvGrpSpPr/>
+        <p:nvPr/>
+      </p:nvGrpSpPr>
+      <p:grpSpPr>
+        <a:xfrm>
+          <a:off x="0" y="0"/>
+          <a:ext cx="0" cy="0"/>
+          <a:chOff x="0" y="0"/>
+          <a:chExt cx="0" cy="0"/>
+        </a:xfrm>
+      </p:grpSpPr>
+      <p:sp>
+        <p:nvSpPr>
+          <p:cNvPr id="2" name="Espace réservé de l'image des diapositives 1"/>
+          <p:cNvSpPr>
+            <a:spLocks noGrp="1" noRot="1" noChangeAspect="1"/>
+          </p:cNvSpPr>
+          <p:nvPr>
+            <p:ph type="sldImg"/>
+          </p:nvPr>
+        </p:nvSpPr>
+        <p:spPr/>
+      </p:sp>
+      <p:sp>
+        <p:nvSpPr>
+          <p:cNvPr id="3" name="Espace réservé des notes 2"/>
+          <p:cNvSpPr>
+            <a:spLocks noGrp="1"/>
+          </p:cNvSpPr>
+          <p:nvPr>
+            <p:ph type="body" idx="1"/>
+          </p:nvPr>
+        </p:nvSpPr>
+        <p:spPr/>
+        <p:txBody>
+          <a:bodyPr/>
+          <a:lstStyle/>
+          <a:p>
+            <a:endParaRPr lang="es-AR" dirty="0"/>
+          </a:p>
+        </p:txBody>
+      </p:sp>
+      <p:sp>
+        <p:nvSpPr>
+          <p:cNvPr id="4" name="Espace réservé du numéro de diapositive 3"/>
+          <p:cNvSpPr>
+            <a:spLocks noGrp="1"/>
+          </p:cNvSpPr>
+          <p:nvPr>
+            <p:ph type="sldNum" sz="quarter" idx="5"/>
+          </p:nvPr>
+        </p:nvSpPr>
+        <p:spPr/>
+        <p:txBody>
+          <a:bodyPr/>
+          <a:lstStyle/>
+          <a:p>
+            <a:fld id="{300B6AC0-7D31-4FAF-A754-AE5D0A178719}" type="slidenum">
+              <a:rPr lang="es-AR" smtClean="0"/>
+              <a:t>14</a:t>
+            </a:fld>
+            <a:endParaRPr lang="es-AR"/>
+          </a:p>
+        </p:txBody>
+      </p:sp>
+    </p:spTree>
+    <p:extLst>
+      <p:ext uri="{BB962C8B-B14F-4D97-AF65-F5344CB8AC3E}">
+        <p14:creationId xmlns:p14="http://schemas.microsoft.com/office/powerpoint/2010/main" val="2999176174"/>
+      </p:ext>
+    </p:extLst>
+  </p:cSld>
+  <p:clrMapOvr>
+    <a:masterClrMapping/>
+  </p:clrMapOvr>
+</p:notes>
+</file>
+
 <file path=ppt/slideLayouts/slideLayout1.xml><?xml version="1.0" encoding="utf-8"?>
 <p:sldLayout xmlns:a="http://schemas.openxmlformats.org/drawingml/2006/main" xmlns:r="http://schemas.openxmlformats.org/officeDocument/2006/relationships" xmlns:p="http://schemas.openxmlformats.org/presentationml/2006/main" type="title" preserve="1">
   <p:cSld name="Diapositive de titre">
@@ -15382,7 +15746,7 @@
           <a:p>
             <a:fld id="{602571BD-3D54-40D5-A404-DFC2E61383C4}" type="datetimeFigureOut">
               <a:rPr lang="es-AR" smtClean="0"/>
-              <a:t>6/10/2025</a:t>
+              <a:t>7/10/2025</a:t>
             </a:fld>
             <a:endParaRPr lang="es-AR"/>
           </a:p>
@@ -15582,7 +15946,7 @@
           <a:p>
             <a:fld id="{602571BD-3D54-40D5-A404-DFC2E61383C4}" type="datetimeFigureOut">
               <a:rPr lang="es-AR" smtClean="0"/>
-              <a:t>6/10/2025</a:t>
+              <a:t>7/10/2025</a:t>
             </a:fld>
             <a:endParaRPr lang="es-AR"/>
           </a:p>
@@ -15792,7 +16156,7 @@
           <a:p>
             <a:fld id="{602571BD-3D54-40D5-A404-DFC2E61383C4}" type="datetimeFigureOut">
               <a:rPr lang="es-AR" smtClean="0"/>
-              <a:t>6/10/2025</a:t>
+              <a:t>7/10/2025</a:t>
             </a:fld>
             <a:endParaRPr lang="es-AR"/>
           </a:p>
@@ -15992,7 +16356,7 @@
           <a:p>
             <a:fld id="{602571BD-3D54-40D5-A404-DFC2E61383C4}" type="datetimeFigureOut">
               <a:rPr lang="es-AR" smtClean="0"/>
-              <a:t>6/10/2025</a:t>
+              <a:t>7/10/2025</a:t>
             </a:fld>
             <a:endParaRPr lang="es-AR"/>
           </a:p>
@@ -16268,7 +16632,7 @@
           <a:p>
             <a:fld id="{602571BD-3D54-40D5-A404-DFC2E61383C4}" type="datetimeFigureOut">
               <a:rPr lang="es-AR" smtClean="0"/>
-              <a:t>6/10/2025</a:t>
+              <a:t>7/10/2025</a:t>
             </a:fld>
             <a:endParaRPr lang="es-AR"/>
           </a:p>
@@ -16536,7 +16900,7 @@
           <a:p>
             <a:fld id="{602571BD-3D54-40D5-A404-DFC2E61383C4}" type="datetimeFigureOut">
               <a:rPr lang="es-AR" smtClean="0"/>
-              <a:t>6/10/2025</a:t>
+              <a:t>7/10/2025</a:t>
             </a:fld>
             <a:endParaRPr lang="es-AR"/>
           </a:p>
@@ -16951,7 +17315,7 @@
           <a:p>
             <a:fld id="{602571BD-3D54-40D5-A404-DFC2E61383C4}" type="datetimeFigureOut">
               <a:rPr lang="es-AR" smtClean="0"/>
-              <a:t>6/10/2025</a:t>
+              <a:t>7/10/2025</a:t>
             </a:fld>
             <a:endParaRPr lang="es-AR"/>
           </a:p>
@@ -17093,7 +17457,7 @@
           <a:p>
             <a:fld id="{602571BD-3D54-40D5-A404-DFC2E61383C4}" type="datetimeFigureOut">
               <a:rPr lang="es-AR" smtClean="0"/>
-              <a:t>6/10/2025</a:t>
+              <a:t>7/10/2025</a:t>
             </a:fld>
             <a:endParaRPr lang="es-AR"/>
           </a:p>
@@ -17206,7 +17570,7 @@
           <a:p>
             <a:fld id="{602571BD-3D54-40D5-A404-DFC2E61383C4}" type="datetimeFigureOut">
               <a:rPr lang="es-AR" smtClean="0"/>
-              <a:t>6/10/2025</a:t>
+              <a:t>7/10/2025</a:t>
             </a:fld>
             <a:endParaRPr lang="es-AR"/>
           </a:p>
@@ -17519,7 +17883,7 @@
           <a:p>
             <a:fld id="{602571BD-3D54-40D5-A404-DFC2E61383C4}" type="datetimeFigureOut">
               <a:rPr lang="es-AR" smtClean="0"/>
-              <a:t>6/10/2025</a:t>
+              <a:t>7/10/2025</a:t>
             </a:fld>
             <a:endParaRPr lang="es-AR"/>
           </a:p>
@@ -17808,7 +18172,7 @@
           <a:p>
             <a:fld id="{602571BD-3D54-40D5-A404-DFC2E61383C4}" type="datetimeFigureOut">
               <a:rPr lang="es-AR" smtClean="0"/>
-              <a:t>6/10/2025</a:t>
+              <a:t>7/10/2025</a:t>
             </a:fld>
             <a:endParaRPr lang="es-AR"/>
           </a:p>
@@ -18051,7 +18415,7 @@
           <a:p>
             <a:fld id="{602571BD-3D54-40D5-A404-DFC2E61383C4}" type="datetimeFigureOut">
               <a:rPr lang="es-AR" smtClean="0"/>
-              <a:t>6/10/2025</a:t>
+              <a:t>7/10/2025</a:t>
             </a:fld>
             <a:endParaRPr lang="es-AR"/>
           </a:p>
@@ -31097,7 +31461,7 @@
           <a:p>
             <a:pPr algn="ctr"/>
             <a:r>
-              <a:rPr lang="en-US" sz="4800" kern="1200">
+              <a:rPr lang="en-US" sz="4800" kern="1200" dirty="0">
                 <a:solidFill>
                   <a:srgbClr val="FFFFFF"/>
                 </a:solidFill>
@@ -31105,8 +31469,27 @@
                 <a:ea typeface="+mj-ea"/>
                 <a:cs typeface="+mj-cs"/>
               </a:rPr>
-              <a:t>Les données utilisées</a:t>
+              <a:t>Les données </a:t>
             </a:r>
+            <a:r>
+              <a:rPr lang="en-US" sz="4800" kern="1200" dirty="0" err="1">
+                <a:solidFill>
+                  <a:srgbClr val="FFFFFF"/>
+                </a:solidFill>
+                <a:latin typeface="+mj-lt"/>
+                <a:ea typeface="+mj-ea"/>
+                <a:cs typeface="+mj-cs"/>
+              </a:rPr>
+              <a:t>utilisées</a:t>
+            </a:r>
+            <a:endParaRPr lang="en-US" sz="4800" kern="1200" dirty="0">
+              <a:solidFill>
+                <a:srgbClr val="FFFFFF"/>
+              </a:solidFill>
+              <a:latin typeface="+mj-lt"/>
+              <a:ea typeface="+mj-ea"/>
+              <a:cs typeface="+mj-cs"/>
+            </a:endParaRPr>
           </a:p>
         </p:txBody>
       </p:sp>
@@ -32924,7 +33307,7 @@
           <p:nvPr/>
         </p:nvPicPr>
         <p:blipFill>
-          <a:blip r:embed="rId2"/>
+          <a:blip r:embed="rId3"/>
           <a:stretch>
             <a:fillRect/>
           </a:stretch>
@@ -36846,7 +37229,7 @@
         </p:xfrm>
         <a:graphic>
           <a:graphicData uri="http://schemas.openxmlformats.org/drawingml/2006/diagram">
-            <dgm:relIds xmlns:dgm="http://schemas.openxmlformats.org/drawingml/2006/diagram" xmlns:r="http://schemas.openxmlformats.org/officeDocument/2006/relationships" r:dm="rId2" r:lo="rId3" r:qs="rId4" r:cs="rId5"/>
+            <dgm:relIds xmlns:dgm="http://schemas.openxmlformats.org/drawingml/2006/diagram" xmlns:r="http://schemas.openxmlformats.org/officeDocument/2006/relationships" r:dm="rId3" r:lo="rId4" r:qs="rId5" r:cs="rId6"/>
           </a:graphicData>
         </a:graphic>
       </p:graphicFrame>

--- a/Doc Slide/Enhanced Automated Construction Quantity Takeoff.pptx
+++ b/Doc Slide/Enhanced Automated Construction Quantity Takeoff.pptx
@@ -5,7 +5,7 @@
     <p:sldMasterId id="2147483648" r:id="rId1"/>
   </p:sldMasterIdLst>
   <p:notesMasterIdLst>
-    <p:notesMasterId r:id="rId18"/>
+    <p:notesMasterId r:id="rId17"/>
   </p:notesMasterIdLst>
   <p:sldIdLst>
     <p:sldId id="256" r:id="rId2"/>
@@ -17,13 +17,12 @@
     <p:sldId id="263" r:id="rId8"/>
     <p:sldId id="265" r:id="rId9"/>
     <p:sldId id="264" r:id="rId10"/>
-    <p:sldId id="269" r:id="rId11"/>
+    <p:sldId id="272" r:id="rId11"/>
     <p:sldId id="266" r:id="rId12"/>
-    <p:sldId id="268" r:id="rId13"/>
-    <p:sldId id="262" r:id="rId14"/>
-    <p:sldId id="267" r:id="rId15"/>
-    <p:sldId id="270" r:id="rId16"/>
-    <p:sldId id="271" r:id="rId17"/>
+    <p:sldId id="262" r:id="rId13"/>
+    <p:sldId id="267" r:id="rId14"/>
+    <p:sldId id="270" r:id="rId15"/>
+    <p:sldId id="271" r:id="rId16"/>
   </p:sldIdLst>
   <p:sldSz cx="12192000" cy="6858000"/>
   <p:notesSz cx="6858000" cy="9144000"/>
@@ -4385,10 +4384,18 @@
             </a:lnSpc>
           </a:pPr>
           <a:r>
-            <a:rPr lang="es-AR"/>
-            <a:t>Domain-specific LLMs</a:t>
+            <a:rPr lang="es-AR" dirty="0" err="1"/>
+            <a:t>Domain-specific</a:t>
           </a:r>
-          <a:endParaRPr lang="en-US"/>
+          <a:r>
+            <a:rPr lang="es-AR" dirty="0"/>
+            <a:t> </a:t>
+          </a:r>
+          <a:r>
+            <a:rPr lang="es-AR" dirty="0" err="1"/>
+            <a:t>LLMs</a:t>
+          </a:r>
+          <a:endParaRPr lang="en-US" dirty="0"/>
         </a:p>
       </dgm:t>
     </dgm:pt>
@@ -4740,7 +4747,7 @@
   <dgm:whole/>
   <dgm:extLst>
     <a:ext uri="http://schemas.microsoft.com/office/drawing/2008/diagram">
-      <dsp:dataModelExt xmlns:dsp="http://schemas.microsoft.com/office/drawing/2008/diagram" relId="rId6" minVer="http://schemas.openxmlformats.org/drawingml/2006/diagram"/>
+      <dsp:dataModelExt xmlns:dsp="http://schemas.microsoft.com/office/drawing/2008/diagram" relId="rId7" minVer="http://schemas.openxmlformats.org/drawingml/2006/diagram"/>
     </a:ext>
   </dgm:extLst>
 </dgm:dataModel>
@@ -4984,7 +4991,7 @@
   <dgm:whole/>
   <dgm:extLst>
     <a:ext uri="http://schemas.microsoft.com/office/drawing/2008/diagram">
-      <dsp:dataModelExt xmlns:dsp="http://schemas.microsoft.com/office/drawing/2008/diagram" relId="rId6" minVer="http://schemas.openxmlformats.org/drawingml/2006/diagram"/>
+      <dsp:dataModelExt xmlns:dsp="http://schemas.microsoft.com/office/drawing/2008/diagram" relId="rId7" minVer="http://schemas.openxmlformats.org/drawingml/2006/diagram"/>
     </a:ext>
   </dgm:extLst>
 </dgm:dataModel>
@@ -5050,7 +5057,7 @@
         <a:p>
           <a:r>
             <a:rPr lang="fr-FR" dirty="0"/>
-            <a:t>PDF -  Plans 2D</a:t>
+            <a:t>PDF -  Plans 2D, documents techniques</a:t>
           </a:r>
           <a:endParaRPr lang="en-US" dirty="0"/>
         </a:p>
@@ -5274,10 +5281,10 @@
         <a:lstStyle/>
         <a:p>
           <a:r>
-            <a:rPr lang="fr-FR"/>
-            <a:t>Corrections des textes par LLM – GPT-4o</a:t>
+            <a:rPr lang="fr-FR" dirty="0"/>
+            <a:t>Corrections des textes par LLM   GPT-4o</a:t>
           </a:r>
-          <a:endParaRPr lang="en-US"/>
+          <a:endParaRPr lang="en-US" dirty="0"/>
         </a:p>
       </dgm:t>
     </dgm:pt>
@@ -6344,10 +6351,18 @@
             <a:buNone/>
           </a:pPr>
           <a:r>
-            <a:rPr lang="es-AR" sz="1700" kern="1200"/>
-            <a:t>Domain-specific LLMs</a:t>
+            <a:rPr lang="es-AR" sz="1700" kern="1200" dirty="0" err="1"/>
+            <a:t>Domain-specific</a:t>
           </a:r>
-          <a:endParaRPr lang="en-US" sz="1700" kern="1200"/>
+          <a:r>
+            <a:rPr lang="es-AR" sz="1700" kern="1200" dirty="0"/>
+            <a:t> </a:t>
+          </a:r>
+          <a:r>
+            <a:rPr lang="es-AR" sz="1700" kern="1200" dirty="0" err="1"/>
+            <a:t>LLMs</a:t>
+          </a:r>
+          <a:endParaRPr lang="en-US" sz="1700" kern="1200" dirty="0"/>
         </a:p>
       </dsp:txBody>
       <dsp:txXfrm>
@@ -7054,7 +7069,7 @@
           </a:pPr>
           <a:r>
             <a:rPr lang="fr-FR" sz="2200" kern="1200" dirty="0"/>
-            <a:t>PDF -  Plans 2D</a:t>
+            <a:t>PDF -  Plans 2D, documents techniques</a:t>
           </a:r>
           <a:endParaRPr lang="en-US" sz="2200" kern="1200" dirty="0"/>
         </a:p>
@@ -7292,10 +7307,10 @@
             <a:buChar char="•"/>
           </a:pPr>
           <a:r>
-            <a:rPr lang="fr-FR" sz="2200" kern="1200"/>
-            <a:t>Corrections des textes par LLM – GPT-4o</a:t>
+            <a:rPr lang="fr-FR" sz="2200" kern="1200" dirty="0"/>
+            <a:t>Corrections des textes par LLM   GPT-4o</a:t>
           </a:r>
-          <a:endParaRPr lang="en-US" sz="2200" kern="1200"/>
+          <a:endParaRPr lang="en-US" sz="2200" kern="1200" dirty="0"/>
         </a:p>
       </dsp:txBody>
       <dsp:txXfrm rot="-5400000">
@@ -14827,7 +14842,7 @@
           <a:p>
             <a:fld id="{127824B3-DC8C-4FD9-B3F9-F8C5DB33BA10}" type="datetimeFigureOut">
               <a:rPr lang="es-AR" smtClean="0"/>
-              <a:t>7/10/2025</a:t>
+              <a:t>9/10/2025</a:t>
             </a:fld>
             <a:endParaRPr lang="es-AR"/>
           </a:p>
@@ -15139,9 +15154,815 @@
           <a:bodyPr/>
           <a:lstStyle/>
           <a:p>
+            <a:endParaRPr lang="es-AR" dirty="0"/>
+          </a:p>
+        </p:txBody>
+      </p:sp>
+      <p:sp>
+        <p:nvSpPr>
+          <p:cNvPr id="4" name="Espace réservé du numéro de diapositive 3"/>
+          <p:cNvSpPr>
+            <a:spLocks noGrp="1"/>
+          </p:cNvSpPr>
+          <p:nvPr>
+            <p:ph type="sldNum" sz="quarter" idx="5"/>
+          </p:nvPr>
+        </p:nvSpPr>
+        <p:spPr/>
+        <p:txBody>
+          <a:bodyPr/>
+          <a:lstStyle/>
+          <a:p>
+            <a:fld id="{300B6AC0-7D31-4FAF-A754-AE5D0A178719}" type="slidenum">
+              <a:rPr lang="es-AR" smtClean="0"/>
+              <a:t>1</a:t>
+            </a:fld>
+            <a:endParaRPr lang="es-AR"/>
+          </a:p>
+        </p:txBody>
+      </p:sp>
+    </p:spTree>
+    <p:extLst>
+      <p:ext uri="{BB962C8B-B14F-4D97-AF65-F5344CB8AC3E}">
+        <p14:creationId xmlns:p14="http://schemas.microsoft.com/office/powerpoint/2010/main" val="2502066243"/>
+      </p:ext>
+    </p:extLst>
+  </p:cSld>
+  <p:clrMapOvr>
+    <a:masterClrMapping/>
+  </p:clrMapOvr>
+</p:notes>
+</file>
+
+<file path=ppt/notesSlides/notesSlide10.xml><?xml version="1.0" encoding="utf-8"?>
+<p:notes xmlns:a="http://schemas.openxmlformats.org/drawingml/2006/main" xmlns:r="http://schemas.openxmlformats.org/officeDocument/2006/relationships" xmlns:p="http://schemas.openxmlformats.org/presentationml/2006/main">
+  <p:cSld>
+    <p:spTree>
+      <p:nvGrpSpPr>
+        <p:cNvPr id="1" name=""/>
+        <p:cNvGrpSpPr/>
+        <p:nvPr/>
+      </p:nvGrpSpPr>
+      <p:grpSpPr>
+        <a:xfrm>
+          <a:off x="0" y="0"/>
+          <a:ext cx="0" cy="0"/>
+          <a:chOff x="0" y="0"/>
+          <a:chExt cx="0" cy="0"/>
+        </a:xfrm>
+      </p:grpSpPr>
+      <p:sp>
+        <p:nvSpPr>
+          <p:cNvPr id="2" name="Espace réservé de l'image des diapositives 1"/>
+          <p:cNvSpPr>
+            <a:spLocks noGrp="1" noRot="1" noChangeAspect="1"/>
+          </p:cNvSpPr>
+          <p:nvPr>
+            <p:ph type="sldImg"/>
+          </p:nvPr>
+        </p:nvSpPr>
+        <p:spPr/>
+      </p:sp>
+      <p:sp>
+        <p:nvSpPr>
+          <p:cNvPr id="3" name="Espace réservé des notes 2"/>
+          <p:cNvSpPr>
+            <a:spLocks noGrp="1"/>
+          </p:cNvSpPr>
+          <p:nvPr>
+            <p:ph type="body" idx="1"/>
+          </p:nvPr>
+        </p:nvSpPr>
+        <p:spPr/>
+        <p:txBody>
+          <a:bodyPr/>
+          <a:lstStyle/>
+          <a:p>
+            <a:endParaRPr lang="es-AR" dirty="0"/>
+          </a:p>
+        </p:txBody>
+      </p:sp>
+      <p:sp>
+        <p:nvSpPr>
+          <p:cNvPr id="4" name="Espace réservé du numéro de diapositive 3"/>
+          <p:cNvSpPr>
+            <a:spLocks noGrp="1"/>
+          </p:cNvSpPr>
+          <p:nvPr>
+            <p:ph type="sldNum" sz="quarter" idx="5"/>
+          </p:nvPr>
+        </p:nvSpPr>
+        <p:spPr/>
+        <p:txBody>
+          <a:bodyPr/>
+          <a:lstStyle/>
+          <a:p>
+            <a:fld id="{300B6AC0-7D31-4FAF-A754-AE5D0A178719}" type="slidenum">
+              <a:rPr lang="es-AR" smtClean="0"/>
+              <a:t>12</a:t>
+            </a:fld>
+            <a:endParaRPr lang="es-AR"/>
+          </a:p>
+        </p:txBody>
+      </p:sp>
+    </p:spTree>
+    <p:extLst>
+      <p:ext uri="{BB962C8B-B14F-4D97-AF65-F5344CB8AC3E}">
+        <p14:creationId xmlns:p14="http://schemas.microsoft.com/office/powerpoint/2010/main" val="1857783690"/>
+      </p:ext>
+    </p:extLst>
+  </p:cSld>
+  <p:clrMapOvr>
+    <a:masterClrMapping/>
+  </p:clrMapOvr>
+</p:notes>
+</file>
+
+<file path=ppt/notesSlides/notesSlide11.xml><?xml version="1.0" encoding="utf-8"?>
+<p:notes xmlns:a="http://schemas.openxmlformats.org/drawingml/2006/main" xmlns:r="http://schemas.openxmlformats.org/officeDocument/2006/relationships" xmlns:p="http://schemas.openxmlformats.org/presentationml/2006/main">
+  <p:cSld>
+    <p:spTree>
+      <p:nvGrpSpPr>
+        <p:cNvPr id="1" name=""/>
+        <p:cNvGrpSpPr/>
+        <p:nvPr/>
+      </p:nvGrpSpPr>
+      <p:grpSpPr>
+        <a:xfrm>
+          <a:off x="0" y="0"/>
+          <a:ext cx="0" cy="0"/>
+          <a:chOff x="0" y="0"/>
+          <a:chExt cx="0" cy="0"/>
+        </a:xfrm>
+      </p:grpSpPr>
+      <p:sp>
+        <p:nvSpPr>
+          <p:cNvPr id="2" name="Espace réservé de l'image des diapositives 1"/>
+          <p:cNvSpPr>
+            <a:spLocks noGrp="1" noRot="1" noChangeAspect="1"/>
+          </p:cNvSpPr>
+          <p:nvPr>
+            <p:ph type="sldImg"/>
+          </p:nvPr>
+        </p:nvSpPr>
+        <p:spPr/>
+      </p:sp>
+      <p:sp>
+        <p:nvSpPr>
+          <p:cNvPr id="3" name="Espace réservé des notes 2"/>
+          <p:cNvSpPr>
+            <a:spLocks noGrp="1"/>
+          </p:cNvSpPr>
+          <p:nvPr>
+            <p:ph type="body" idx="1"/>
+          </p:nvPr>
+        </p:nvSpPr>
+        <p:spPr/>
+        <p:txBody>
+          <a:bodyPr/>
+          <a:lstStyle/>
+          <a:p>
+            <a:r>
+              <a:rPr lang="fr-FR" b="1" dirty="0" err="1"/>
+              <a:t>rebar</a:t>
+            </a:r>
+            <a:r>
+              <a:rPr lang="fr-FR" b="1" dirty="0"/>
+              <a:t> </a:t>
+            </a:r>
+            <a:r>
+              <a:rPr lang="fr-FR" b="1" dirty="0" err="1"/>
+              <a:t>work</a:t>
+            </a:r>
+            <a:r>
+              <a:rPr lang="fr-FR" b="1" dirty="0"/>
+              <a:t>” = “travaux de ferraillage”</a:t>
+            </a:r>
             <a:r>
               <a:rPr lang="fr-FR" dirty="0"/>
-              <a:t>Confrontation des données extraite par OCR avec les originaux. Aucune précision sur comment il font probablement qu’il donne le texte OCR avec l’image fournis</a:t>
+              <a:t> </a:t>
+            </a:r>
+            <a:endParaRPr lang="es-AR" dirty="0"/>
+          </a:p>
+        </p:txBody>
+      </p:sp>
+      <p:sp>
+        <p:nvSpPr>
+          <p:cNvPr id="4" name="Espace réservé du numéro de diapositive 3"/>
+          <p:cNvSpPr>
+            <a:spLocks noGrp="1"/>
+          </p:cNvSpPr>
+          <p:nvPr>
+            <p:ph type="sldNum" sz="quarter" idx="5"/>
+          </p:nvPr>
+        </p:nvSpPr>
+        <p:spPr/>
+        <p:txBody>
+          <a:bodyPr/>
+          <a:lstStyle/>
+          <a:p>
+            <a:fld id="{300B6AC0-7D31-4FAF-A754-AE5D0A178719}" type="slidenum">
+              <a:rPr lang="es-AR" smtClean="0"/>
+              <a:t>13</a:t>
+            </a:fld>
+            <a:endParaRPr lang="es-AR"/>
+          </a:p>
+        </p:txBody>
+      </p:sp>
+    </p:spTree>
+    <p:extLst>
+      <p:ext uri="{BB962C8B-B14F-4D97-AF65-F5344CB8AC3E}">
+        <p14:creationId xmlns:p14="http://schemas.microsoft.com/office/powerpoint/2010/main" val="2999176174"/>
+      </p:ext>
+    </p:extLst>
+  </p:cSld>
+  <p:clrMapOvr>
+    <a:masterClrMapping/>
+  </p:clrMapOvr>
+</p:notes>
+</file>
+
+<file path=ppt/notesSlides/notesSlide2.xml><?xml version="1.0" encoding="utf-8"?>
+<p:notes xmlns:a="http://schemas.openxmlformats.org/drawingml/2006/main" xmlns:r="http://schemas.openxmlformats.org/officeDocument/2006/relationships" xmlns:p="http://schemas.openxmlformats.org/presentationml/2006/main">
+  <p:cSld>
+    <p:spTree>
+      <p:nvGrpSpPr>
+        <p:cNvPr id="1" name=""/>
+        <p:cNvGrpSpPr/>
+        <p:nvPr/>
+      </p:nvGrpSpPr>
+      <p:grpSpPr>
+        <a:xfrm>
+          <a:off x="0" y="0"/>
+          <a:ext cx="0" cy="0"/>
+          <a:chOff x="0" y="0"/>
+          <a:chExt cx="0" cy="0"/>
+        </a:xfrm>
+      </p:grpSpPr>
+      <p:sp>
+        <p:nvSpPr>
+          <p:cNvPr id="2" name="Espace réservé de l'image des diapositives 1"/>
+          <p:cNvSpPr>
+            <a:spLocks noGrp="1" noRot="1" noChangeAspect="1"/>
+          </p:cNvSpPr>
+          <p:nvPr>
+            <p:ph type="sldImg"/>
+          </p:nvPr>
+        </p:nvSpPr>
+        <p:spPr/>
+      </p:sp>
+      <p:sp>
+        <p:nvSpPr>
+          <p:cNvPr id="3" name="Espace réservé des notes 2"/>
+          <p:cNvSpPr>
+            <a:spLocks noGrp="1"/>
+          </p:cNvSpPr>
+          <p:nvPr>
+            <p:ph type="body" idx="1"/>
+          </p:nvPr>
+        </p:nvSpPr>
+        <p:spPr/>
+        <p:txBody>
+          <a:bodyPr/>
+          <a:lstStyle/>
+          <a:p>
+            <a:endParaRPr lang="es-AR" dirty="0"/>
+          </a:p>
+        </p:txBody>
+      </p:sp>
+      <p:sp>
+        <p:nvSpPr>
+          <p:cNvPr id="4" name="Espace réservé du numéro de diapositive 3"/>
+          <p:cNvSpPr>
+            <a:spLocks noGrp="1"/>
+          </p:cNvSpPr>
+          <p:nvPr>
+            <p:ph type="sldNum" sz="quarter" idx="5"/>
+          </p:nvPr>
+        </p:nvSpPr>
+        <p:spPr/>
+        <p:txBody>
+          <a:bodyPr/>
+          <a:lstStyle/>
+          <a:p>
+            <a:fld id="{300B6AC0-7D31-4FAF-A754-AE5D0A178719}" type="slidenum">
+              <a:rPr lang="es-AR" smtClean="0"/>
+              <a:t>2</a:t>
+            </a:fld>
+            <a:endParaRPr lang="es-AR"/>
+          </a:p>
+        </p:txBody>
+      </p:sp>
+    </p:spTree>
+    <p:extLst>
+      <p:ext uri="{BB962C8B-B14F-4D97-AF65-F5344CB8AC3E}">
+        <p14:creationId xmlns:p14="http://schemas.microsoft.com/office/powerpoint/2010/main" val="1891888866"/>
+      </p:ext>
+    </p:extLst>
+  </p:cSld>
+  <p:clrMapOvr>
+    <a:masterClrMapping/>
+  </p:clrMapOvr>
+</p:notes>
+</file>
+
+<file path=ppt/notesSlides/notesSlide3.xml><?xml version="1.0" encoding="utf-8"?>
+<p:notes xmlns:a="http://schemas.openxmlformats.org/drawingml/2006/main" xmlns:r="http://schemas.openxmlformats.org/officeDocument/2006/relationships" xmlns:p="http://schemas.openxmlformats.org/presentationml/2006/main">
+  <p:cSld>
+    <p:spTree>
+      <p:nvGrpSpPr>
+        <p:cNvPr id="1" name=""/>
+        <p:cNvGrpSpPr/>
+        <p:nvPr/>
+      </p:nvGrpSpPr>
+      <p:grpSpPr>
+        <a:xfrm>
+          <a:off x="0" y="0"/>
+          <a:ext cx="0" cy="0"/>
+          <a:chOff x="0" y="0"/>
+          <a:chExt cx="0" cy="0"/>
+        </a:xfrm>
+      </p:grpSpPr>
+      <p:sp>
+        <p:nvSpPr>
+          <p:cNvPr id="2" name="Espace réservé de l'image des diapositives 1"/>
+          <p:cNvSpPr>
+            <a:spLocks noGrp="1" noRot="1" noChangeAspect="1"/>
+          </p:cNvSpPr>
+          <p:nvPr>
+            <p:ph type="sldImg"/>
+          </p:nvPr>
+        </p:nvSpPr>
+        <p:spPr/>
+      </p:sp>
+      <p:sp>
+        <p:nvSpPr>
+          <p:cNvPr id="3" name="Espace réservé des notes 2"/>
+          <p:cNvSpPr>
+            <a:spLocks noGrp="1"/>
+          </p:cNvSpPr>
+          <p:nvPr>
+            <p:ph type="body" idx="1"/>
+          </p:nvPr>
+        </p:nvSpPr>
+        <p:spPr/>
+        <p:txBody>
+          <a:bodyPr/>
+          <a:lstStyle/>
+          <a:p>
+            <a:pPr marL="0" marR="0" lvl="0" indent="0" algn="l" defTabSz="914400" rtl="0" eaLnBrk="1" fontAlgn="auto" latinLnBrk="0" hangingPunct="1">
+              <a:lnSpc>
+                <a:spcPct val="100000"/>
+              </a:lnSpc>
+              <a:spcBef>
+                <a:spcPts val="0"/>
+              </a:spcBef>
+              <a:spcAft>
+                <a:spcPts val="0"/>
+              </a:spcAft>
+              <a:buClrTx/>
+              <a:buSzTx/>
+              <a:buFontTx/>
+              <a:buNone/>
+              <a:tabLst/>
+              <a:defRPr/>
+            </a:pPr>
+            <a:r>
+              <a:rPr lang="fr-FR" dirty="0"/>
+              <a:t>QTO finalement c’est des métrés </a:t>
+            </a:r>
+          </a:p>
+          <a:p>
+            <a:r>
+              <a:rPr lang="fr-FR" dirty="0"/>
+              <a:t>Généralement réaliser à  l’aide d’un BIM </a:t>
+            </a:r>
+          </a:p>
+          <a:p>
+            <a:r>
+              <a:rPr lang="fr-FR" dirty="0"/>
+              <a:t>Pas toujours de BIM </a:t>
+            </a:r>
+            <a:r>
+              <a:rPr lang="es-AR" dirty="0"/>
+              <a:t>qui lui </a:t>
+            </a:r>
+            <a:r>
+              <a:rPr lang="es-AR" dirty="0" err="1"/>
+              <a:t>regorge</a:t>
+            </a:r>
+            <a:r>
+              <a:rPr lang="es-AR" dirty="0"/>
+              <a:t> de </a:t>
+            </a:r>
+            <a:r>
+              <a:rPr lang="es-AR" dirty="0" err="1"/>
+              <a:t>données</a:t>
+            </a:r>
+            <a:r>
+              <a:rPr lang="es-AR" dirty="0"/>
+              <a:t> </a:t>
+            </a:r>
+          </a:p>
+          <a:p>
+            <a:r>
+              <a:rPr lang="es-AR" dirty="0" err="1"/>
+              <a:t>Donc</a:t>
+            </a:r>
+            <a:r>
+              <a:rPr lang="es-AR" dirty="0"/>
+              <a:t> </a:t>
+            </a:r>
+            <a:r>
+              <a:rPr lang="es-AR" dirty="0" err="1"/>
+              <a:t>utilisation</a:t>
+            </a:r>
+            <a:r>
+              <a:rPr lang="es-AR" dirty="0"/>
+              <a:t> de plan 2D </a:t>
+            </a:r>
+            <a:r>
+              <a:rPr lang="es-AR" dirty="0" err="1"/>
+              <a:t>slide</a:t>
+            </a:r>
+            <a:r>
+              <a:rPr lang="es-AR" dirty="0"/>
+              <a:t> </a:t>
+            </a:r>
+            <a:r>
+              <a:rPr lang="es-AR" dirty="0" err="1"/>
+              <a:t>suivante</a:t>
+            </a:r>
+            <a:endParaRPr lang="es-AR" dirty="0"/>
+          </a:p>
+          <a:p>
+            <a:endParaRPr lang="es-AR" dirty="0"/>
+          </a:p>
+          <a:p>
+            <a:endParaRPr lang="fr-FR" dirty="0"/>
+          </a:p>
+        </p:txBody>
+      </p:sp>
+      <p:sp>
+        <p:nvSpPr>
+          <p:cNvPr id="4" name="Espace réservé du numéro de diapositive 3"/>
+          <p:cNvSpPr>
+            <a:spLocks noGrp="1"/>
+          </p:cNvSpPr>
+          <p:nvPr>
+            <p:ph type="sldNum" sz="quarter" idx="5"/>
+          </p:nvPr>
+        </p:nvSpPr>
+        <p:spPr/>
+        <p:txBody>
+          <a:bodyPr/>
+          <a:lstStyle/>
+          <a:p>
+            <a:fld id="{300B6AC0-7D31-4FAF-A754-AE5D0A178719}" type="slidenum">
+              <a:rPr lang="es-AR" smtClean="0"/>
+              <a:t>3</a:t>
+            </a:fld>
+            <a:endParaRPr lang="es-AR"/>
+          </a:p>
+        </p:txBody>
+      </p:sp>
+    </p:spTree>
+    <p:extLst>
+      <p:ext uri="{BB962C8B-B14F-4D97-AF65-F5344CB8AC3E}">
+        <p14:creationId xmlns:p14="http://schemas.microsoft.com/office/powerpoint/2010/main" val="3085507721"/>
+      </p:ext>
+    </p:extLst>
+  </p:cSld>
+  <p:clrMapOvr>
+    <a:masterClrMapping/>
+  </p:clrMapOvr>
+</p:notes>
+</file>
+
+<file path=ppt/notesSlides/notesSlide4.xml><?xml version="1.0" encoding="utf-8"?>
+<p:notes xmlns:a="http://schemas.openxmlformats.org/drawingml/2006/main" xmlns:r="http://schemas.openxmlformats.org/officeDocument/2006/relationships" xmlns:p="http://schemas.openxmlformats.org/presentationml/2006/main">
+  <p:cSld>
+    <p:spTree>
+      <p:nvGrpSpPr>
+        <p:cNvPr id="1" name=""/>
+        <p:cNvGrpSpPr/>
+        <p:nvPr/>
+      </p:nvGrpSpPr>
+      <p:grpSpPr>
+        <a:xfrm>
+          <a:off x="0" y="0"/>
+          <a:ext cx="0" cy="0"/>
+          <a:chOff x="0" y="0"/>
+          <a:chExt cx="0" cy="0"/>
+        </a:xfrm>
+      </p:grpSpPr>
+      <p:sp>
+        <p:nvSpPr>
+          <p:cNvPr id="2" name="Espace réservé de l'image des diapositives 1"/>
+          <p:cNvSpPr>
+            <a:spLocks noGrp="1" noRot="1" noChangeAspect="1"/>
+          </p:cNvSpPr>
+          <p:nvPr>
+            <p:ph type="sldImg"/>
+          </p:nvPr>
+        </p:nvSpPr>
+        <p:spPr/>
+      </p:sp>
+      <p:sp>
+        <p:nvSpPr>
+          <p:cNvPr id="3" name="Espace réservé des notes 2"/>
+          <p:cNvSpPr>
+            <a:spLocks noGrp="1"/>
+          </p:cNvSpPr>
+          <p:nvPr>
+            <p:ph type="body" idx="1"/>
+          </p:nvPr>
+        </p:nvSpPr>
+        <p:spPr/>
+        <p:txBody>
+          <a:bodyPr/>
+          <a:lstStyle/>
+          <a:p>
+            <a:endParaRPr lang="es-AR" dirty="0"/>
+          </a:p>
+        </p:txBody>
+      </p:sp>
+      <p:sp>
+        <p:nvSpPr>
+          <p:cNvPr id="4" name="Espace réservé du numéro de diapositive 3"/>
+          <p:cNvSpPr>
+            <a:spLocks noGrp="1"/>
+          </p:cNvSpPr>
+          <p:nvPr>
+            <p:ph type="sldNum" sz="quarter" idx="5"/>
+          </p:nvPr>
+        </p:nvSpPr>
+        <p:spPr/>
+        <p:txBody>
+          <a:bodyPr/>
+          <a:lstStyle/>
+          <a:p>
+            <a:fld id="{300B6AC0-7D31-4FAF-A754-AE5D0A178719}" type="slidenum">
+              <a:rPr lang="es-AR" smtClean="0"/>
+              <a:t>4</a:t>
+            </a:fld>
+            <a:endParaRPr lang="es-AR"/>
+          </a:p>
+        </p:txBody>
+      </p:sp>
+    </p:spTree>
+    <p:extLst>
+      <p:ext uri="{BB962C8B-B14F-4D97-AF65-F5344CB8AC3E}">
+        <p14:creationId xmlns:p14="http://schemas.microsoft.com/office/powerpoint/2010/main" val="637276287"/>
+      </p:ext>
+    </p:extLst>
+  </p:cSld>
+  <p:clrMapOvr>
+    <a:masterClrMapping/>
+  </p:clrMapOvr>
+</p:notes>
+</file>
+
+<file path=ppt/notesSlides/notesSlide5.xml><?xml version="1.0" encoding="utf-8"?>
+<p:notes xmlns:a="http://schemas.openxmlformats.org/drawingml/2006/main" xmlns:r="http://schemas.openxmlformats.org/officeDocument/2006/relationships" xmlns:p="http://schemas.openxmlformats.org/presentationml/2006/main">
+  <p:cSld>
+    <p:spTree>
+      <p:nvGrpSpPr>
+        <p:cNvPr id="1" name=""/>
+        <p:cNvGrpSpPr/>
+        <p:nvPr/>
+      </p:nvGrpSpPr>
+      <p:grpSpPr>
+        <a:xfrm>
+          <a:off x="0" y="0"/>
+          <a:ext cx="0" cy="0"/>
+          <a:chOff x="0" y="0"/>
+          <a:chExt cx="0" cy="0"/>
+        </a:xfrm>
+      </p:grpSpPr>
+      <p:sp>
+        <p:nvSpPr>
+          <p:cNvPr id="2" name="Espace réservé de l'image des diapositives 1"/>
+          <p:cNvSpPr>
+            <a:spLocks noGrp="1" noRot="1" noChangeAspect="1"/>
+          </p:cNvSpPr>
+          <p:nvPr>
+            <p:ph type="sldImg"/>
+          </p:nvPr>
+        </p:nvSpPr>
+        <p:spPr/>
+      </p:sp>
+      <p:sp>
+        <p:nvSpPr>
+          <p:cNvPr id="3" name="Espace réservé des notes 2"/>
+          <p:cNvSpPr>
+            <a:spLocks noGrp="1"/>
+          </p:cNvSpPr>
+          <p:nvPr>
+            <p:ph type="body" idx="1"/>
+          </p:nvPr>
+        </p:nvSpPr>
+        <p:spPr/>
+        <p:txBody>
+          <a:bodyPr/>
+          <a:lstStyle/>
+          <a:p>
+            <a:r>
+              <a:rPr lang="fr-FR" dirty="0"/>
+              <a:t>Les exploitations des LLM dans le domaine de la construction </a:t>
+            </a:r>
+            <a:endParaRPr lang="es-AR" dirty="0"/>
+          </a:p>
+        </p:txBody>
+      </p:sp>
+      <p:sp>
+        <p:nvSpPr>
+          <p:cNvPr id="4" name="Espace réservé du numéro de diapositive 3"/>
+          <p:cNvSpPr>
+            <a:spLocks noGrp="1"/>
+          </p:cNvSpPr>
+          <p:nvPr>
+            <p:ph type="sldNum" sz="quarter" idx="5"/>
+          </p:nvPr>
+        </p:nvSpPr>
+        <p:spPr/>
+        <p:txBody>
+          <a:bodyPr/>
+          <a:lstStyle/>
+          <a:p>
+            <a:fld id="{300B6AC0-7D31-4FAF-A754-AE5D0A178719}" type="slidenum">
+              <a:rPr lang="es-AR" smtClean="0"/>
+              <a:t>5</a:t>
+            </a:fld>
+            <a:endParaRPr lang="es-AR"/>
+          </a:p>
+        </p:txBody>
+      </p:sp>
+    </p:spTree>
+    <p:extLst>
+      <p:ext uri="{BB962C8B-B14F-4D97-AF65-F5344CB8AC3E}">
+        <p14:creationId xmlns:p14="http://schemas.microsoft.com/office/powerpoint/2010/main" val="2402566477"/>
+      </p:ext>
+    </p:extLst>
+  </p:cSld>
+  <p:clrMapOvr>
+    <a:masterClrMapping/>
+  </p:clrMapOvr>
+</p:notes>
+</file>
+
+<file path=ppt/notesSlides/notesSlide6.xml><?xml version="1.0" encoding="utf-8"?>
+<p:notes xmlns:a="http://schemas.openxmlformats.org/drawingml/2006/main" xmlns:r="http://schemas.openxmlformats.org/officeDocument/2006/relationships" xmlns:p="http://schemas.openxmlformats.org/presentationml/2006/main">
+  <p:cSld>
+    <p:spTree>
+      <p:nvGrpSpPr>
+        <p:cNvPr id="1" name=""/>
+        <p:cNvGrpSpPr/>
+        <p:nvPr/>
+      </p:nvGrpSpPr>
+      <p:grpSpPr>
+        <a:xfrm>
+          <a:off x="0" y="0"/>
+          <a:ext cx="0" cy="0"/>
+          <a:chOff x="0" y="0"/>
+          <a:chExt cx="0" cy="0"/>
+        </a:xfrm>
+      </p:grpSpPr>
+      <p:sp>
+        <p:nvSpPr>
+          <p:cNvPr id="2" name="Espace réservé de l'image des diapositives 1"/>
+          <p:cNvSpPr>
+            <a:spLocks noGrp="1" noRot="1" noChangeAspect="1"/>
+          </p:cNvSpPr>
+          <p:nvPr>
+            <p:ph type="sldImg"/>
+          </p:nvPr>
+        </p:nvSpPr>
+        <p:spPr/>
+      </p:sp>
+      <p:sp>
+        <p:nvSpPr>
+          <p:cNvPr id="3" name="Espace réservé des notes 2"/>
+          <p:cNvSpPr>
+            <a:spLocks noGrp="1"/>
+          </p:cNvSpPr>
+          <p:nvPr>
+            <p:ph type="body" idx="1"/>
+          </p:nvPr>
+        </p:nvSpPr>
+        <p:spPr/>
+        <p:txBody>
+          <a:bodyPr/>
+          <a:lstStyle/>
+          <a:p>
+            <a:r>
+              <a:rPr lang="fr-FR" dirty="0"/>
+              <a:t>Structuré le projet en 3 axes </a:t>
+            </a:r>
+            <a:endParaRPr lang="es-AR" dirty="0"/>
+          </a:p>
+        </p:txBody>
+      </p:sp>
+      <p:sp>
+        <p:nvSpPr>
+          <p:cNvPr id="4" name="Espace réservé du numéro de diapositive 3"/>
+          <p:cNvSpPr>
+            <a:spLocks noGrp="1"/>
+          </p:cNvSpPr>
+          <p:nvPr>
+            <p:ph type="sldNum" sz="quarter" idx="5"/>
+          </p:nvPr>
+        </p:nvSpPr>
+        <p:spPr/>
+        <p:txBody>
+          <a:bodyPr/>
+          <a:lstStyle/>
+          <a:p>
+            <a:fld id="{300B6AC0-7D31-4FAF-A754-AE5D0A178719}" type="slidenum">
+              <a:rPr lang="es-AR" smtClean="0"/>
+              <a:t>6</a:t>
+            </a:fld>
+            <a:endParaRPr lang="es-AR"/>
+          </a:p>
+        </p:txBody>
+      </p:sp>
+    </p:spTree>
+    <p:extLst>
+      <p:ext uri="{BB962C8B-B14F-4D97-AF65-F5344CB8AC3E}">
+        <p14:creationId xmlns:p14="http://schemas.microsoft.com/office/powerpoint/2010/main" val="4025750084"/>
+      </p:ext>
+    </p:extLst>
+  </p:cSld>
+  <p:clrMapOvr>
+    <a:masterClrMapping/>
+  </p:clrMapOvr>
+</p:notes>
+</file>
+
+<file path=ppt/notesSlides/notesSlide7.xml><?xml version="1.0" encoding="utf-8"?>
+<p:notes xmlns:a="http://schemas.openxmlformats.org/drawingml/2006/main" xmlns:r="http://schemas.openxmlformats.org/officeDocument/2006/relationships" xmlns:p="http://schemas.openxmlformats.org/presentationml/2006/main">
+  <p:cSld>
+    <p:spTree>
+      <p:nvGrpSpPr>
+        <p:cNvPr id="1" name=""/>
+        <p:cNvGrpSpPr/>
+        <p:nvPr/>
+      </p:nvGrpSpPr>
+      <p:grpSpPr>
+        <a:xfrm>
+          <a:off x="0" y="0"/>
+          <a:ext cx="0" cy="0"/>
+          <a:chOff x="0" y="0"/>
+          <a:chExt cx="0" cy="0"/>
+        </a:xfrm>
+      </p:grpSpPr>
+      <p:sp>
+        <p:nvSpPr>
+          <p:cNvPr id="2" name="Espace réservé de l'image des diapositives 1"/>
+          <p:cNvSpPr>
+            <a:spLocks noGrp="1" noRot="1" noChangeAspect="1"/>
+          </p:cNvSpPr>
+          <p:nvPr>
+            <p:ph type="sldImg"/>
+          </p:nvPr>
+        </p:nvSpPr>
+        <p:spPr/>
+      </p:sp>
+      <p:sp>
+        <p:nvSpPr>
+          <p:cNvPr id="3" name="Espace réservé des notes 2"/>
+          <p:cNvSpPr>
+            <a:spLocks noGrp="1"/>
+          </p:cNvSpPr>
+          <p:nvPr>
+            <p:ph type="body" idx="1"/>
+          </p:nvPr>
+        </p:nvSpPr>
+        <p:spPr/>
+        <p:txBody>
+          <a:bodyPr/>
+          <a:lstStyle/>
+          <a:p>
+            <a:r>
+              <a:rPr lang="fr-FR" dirty="0"/>
+              <a:t>Segmentation des données : découpage des documents en </a:t>
+            </a:r>
+            <a:r>
+              <a:rPr lang="fr-FR" b="1" dirty="0"/>
+              <a:t>tableaux / texte / images</a:t>
+            </a:r>
+            <a:endParaRPr lang="fr-FR" dirty="0"/>
+          </a:p>
+          <a:p>
+            <a:r>
+              <a:rPr lang="fr-FR" dirty="0"/>
+              <a:t>Confrontation des données extraite par OCR avec les originaux. </a:t>
+            </a:r>
+          </a:p>
+          <a:p>
+            <a:r>
+              <a:rPr lang="fr-FR" dirty="0"/>
+              <a:t>Aucune précision sur comment il font probablement qu’il donne le texte OCR avec l’image fournis</a:t>
             </a:r>
           </a:p>
           <a:p>
@@ -15189,7 +16010,7 @@
 </p:notes>
 </file>
 
-<file path=ppt/notesSlides/notesSlide2.xml><?xml version="1.0" encoding="utf-8"?>
+<file path=ppt/notesSlides/notesSlide8.xml><?xml version="1.0" encoding="utf-8"?>
 <p:notes xmlns:a="http://schemas.openxmlformats.org/drawingml/2006/main" xmlns:r="http://schemas.openxmlformats.org/officeDocument/2006/relationships" xmlns:p="http://schemas.openxmlformats.org/presentationml/2006/main">
   <p:cSld>
     <p:spTree>
@@ -15345,7 +16166,7 @@
 </p:notes>
 </file>
 
-<file path=ppt/notesSlides/notesSlide3.xml><?xml version="1.0" encoding="utf-8"?>
+<file path=ppt/notesSlides/notesSlide9.xml><?xml version="1.0" encoding="utf-8"?>
 <p:notes xmlns:a="http://schemas.openxmlformats.org/drawingml/2006/main" xmlns:r="http://schemas.openxmlformats.org/officeDocument/2006/relationships" xmlns:p="http://schemas.openxmlformats.org/presentationml/2006/main">
   <p:cSld>
     <p:spTree>
@@ -15420,174 +16241,6 @@
     <p:extLst>
       <p:ext uri="{BB962C8B-B14F-4D97-AF65-F5344CB8AC3E}">
         <p14:creationId xmlns:p14="http://schemas.microsoft.com/office/powerpoint/2010/main" val="30939271"/>
-      </p:ext>
-    </p:extLst>
-  </p:cSld>
-  <p:clrMapOvr>
-    <a:masterClrMapping/>
-  </p:clrMapOvr>
-</p:notes>
-</file>
-
-<file path=ppt/notesSlides/notesSlide4.xml><?xml version="1.0" encoding="utf-8"?>
-<p:notes xmlns:a="http://schemas.openxmlformats.org/drawingml/2006/main" xmlns:r="http://schemas.openxmlformats.org/officeDocument/2006/relationships" xmlns:p="http://schemas.openxmlformats.org/presentationml/2006/main">
-  <p:cSld>
-    <p:spTree>
-      <p:nvGrpSpPr>
-        <p:cNvPr id="1" name=""/>
-        <p:cNvGrpSpPr/>
-        <p:nvPr/>
-      </p:nvGrpSpPr>
-      <p:grpSpPr>
-        <a:xfrm>
-          <a:off x="0" y="0"/>
-          <a:ext cx="0" cy="0"/>
-          <a:chOff x="0" y="0"/>
-          <a:chExt cx="0" cy="0"/>
-        </a:xfrm>
-      </p:grpSpPr>
-      <p:sp>
-        <p:nvSpPr>
-          <p:cNvPr id="2" name="Espace réservé de l'image des diapositives 1"/>
-          <p:cNvSpPr>
-            <a:spLocks noGrp="1" noRot="1" noChangeAspect="1"/>
-          </p:cNvSpPr>
-          <p:nvPr>
-            <p:ph type="sldImg"/>
-          </p:nvPr>
-        </p:nvSpPr>
-        <p:spPr/>
-      </p:sp>
-      <p:sp>
-        <p:nvSpPr>
-          <p:cNvPr id="3" name="Espace réservé des notes 2"/>
-          <p:cNvSpPr>
-            <a:spLocks noGrp="1"/>
-          </p:cNvSpPr>
-          <p:nvPr>
-            <p:ph type="body" idx="1"/>
-          </p:nvPr>
-        </p:nvSpPr>
-        <p:spPr/>
-        <p:txBody>
-          <a:bodyPr/>
-          <a:lstStyle/>
-          <a:p>
-            <a:endParaRPr lang="es-AR" dirty="0"/>
-          </a:p>
-        </p:txBody>
-      </p:sp>
-      <p:sp>
-        <p:nvSpPr>
-          <p:cNvPr id="4" name="Espace réservé du numéro de diapositive 3"/>
-          <p:cNvSpPr>
-            <a:spLocks noGrp="1"/>
-          </p:cNvSpPr>
-          <p:nvPr>
-            <p:ph type="sldNum" sz="quarter" idx="5"/>
-          </p:nvPr>
-        </p:nvSpPr>
-        <p:spPr/>
-        <p:txBody>
-          <a:bodyPr/>
-          <a:lstStyle/>
-          <a:p>
-            <a:fld id="{300B6AC0-7D31-4FAF-A754-AE5D0A178719}" type="slidenum">
-              <a:rPr lang="es-AR" smtClean="0"/>
-              <a:t>13</a:t>
-            </a:fld>
-            <a:endParaRPr lang="es-AR"/>
-          </a:p>
-        </p:txBody>
-      </p:sp>
-    </p:spTree>
-    <p:extLst>
-      <p:ext uri="{BB962C8B-B14F-4D97-AF65-F5344CB8AC3E}">
-        <p14:creationId xmlns:p14="http://schemas.microsoft.com/office/powerpoint/2010/main" val="1857783690"/>
-      </p:ext>
-    </p:extLst>
-  </p:cSld>
-  <p:clrMapOvr>
-    <a:masterClrMapping/>
-  </p:clrMapOvr>
-</p:notes>
-</file>
-
-<file path=ppt/notesSlides/notesSlide5.xml><?xml version="1.0" encoding="utf-8"?>
-<p:notes xmlns:a="http://schemas.openxmlformats.org/drawingml/2006/main" xmlns:r="http://schemas.openxmlformats.org/officeDocument/2006/relationships" xmlns:p="http://schemas.openxmlformats.org/presentationml/2006/main">
-  <p:cSld>
-    <p:spTree>
-      <p:nvGrpSpPr>
-        <p:cNvPr id="1" name=""/>
-        <p:cNvGrpSpPr/>
-        <p:nvPr/>
-      </p:nvGrpSpPr>
-      <p:grpSpPr>
-        <a:xfrm>
-          <a:off x="0" y="0"/>
-          <a:ext cx="0" cy="0"/>
-          <a:chOff x="0" y="0"/>
-          <a:chExt cx="0" cy="0"/>
-        </a:xfrm>
-      </p:grpSpPr>
-      <p:sp>
-        <p:nvSpPr>
-          <p:cNvPr id="2" name="Espace réservé de l'image des diapositives 1"/>
-          <p:cNvSpPr>
-            <a:spLocks noGrp="1" noRot="1" noChangeAspect="1"/>
-          </p:cNvSpPr>
-          <p:nvPr>
-            <p:ph type="sldImg"/>
-          </p:nvPr>
-        </p:nvSpPr>
-        <p:spPr/>
-      </p:sp>
-      <p:sp>
-        <p:nvSpPr>
-          <p:cNvPr id="3" name="Espace réservé des notes 2"/>
-          <p:cNvSpPr>
-            <a:spLocks noGrp="1"/>
-          </p:cNvSpPr>
-          <p:nvPr>
-            <p:ph type="body" idx="1"/>
-          </p:nvPr>
-        </p:nvSpPr>
-        <p:spPr/>
-        <p:txBody>
-          <a:bodyPr/>
-          <a:lstStyle/>
-          <a:p>
-            <a:endParaRPr lang="es-AR" dirty="0"/>
-          </a:p>
-        </p:txBody>
-      </p:sp>
-      <p:sp>
-        <p:nvSpPr>
-          <p:cNvPr id="4" name="Espace réservé du numéro de diapositive 3"/>
-          <p:cNvSpPr>
-            <a:spLocks noGrp="1"/>
-          </p:cNvSpPr>
-          <p:nvPr>
-            <p:ph type="sldNum" sz="quarter" idx="5"/>
-          </p:nvPr>
-        </p:nvSpPr>
-        <p:spPr/>
-        <p:txBody>
-          <a:bodyPr/>
-          <a:lstStyle/>
-          <a:p>
-            <a:fld id="{300B6AC0-7D31-4FAF-A754-AE5D0A178719}" type="slidenum">
-              <a:rPr lang="es-AR" smtClean="0"/>
-              <a:t>14</a:t>
-            </a:fld>
-            <a:endParaRPr lang="es-AR"/>
-          </a:p>
-        </p:txBody>
-      </p:sp>
-    </p:spTree>
-    <p:extLst>
-      <p:ext uri="{BB962C8B-B14F-4D97-AF65-F5344CB8AC3E}">
-        <p14:creationId xmlns:p14="http://schemas.microsoft.com/office/powerpoint/2010/main" val="2999176174"/>
       </p:ext>
     </p:extLst>
   </p:cSld>
@@ -15746,7 +16399,7 @@
           <a:p>
             <a:fld id="{602571BD-3D54-40D5-A404-DFC2E61383C4}" type="datetimeFigureOut">
               <a:rPr lang="es-AR" smtClean="0"/>
-              <a:t>7/10/2025</a:t>
+              <a:t>9/10/2025</a:t>
             </a:fld>
             <a:endParaRPr lang="es-AR"/>
           </a:p>
@@ -15946,7 +16599,7 @@
           <a:p>
             <a:fld id="{602571BD-3D54-40D5-A404-DFC2E61383C4}" type="datetimeFigureOut">
               <a:rPr lang="es-AR" smtClean="0"/>
-              <a:t>7/10/2025</a:t>
+              <a:t>9/10/2025</a:t>
             </a:fld>
             <a:endParaRPr lang="es-AR"/>
           </a:p>
@@ -16156,7 +16809,7 @@
           <a:p>
             <a:fld id="{602571BD-3D54-40D5-A404-DFC2E61383C4}" type="datetimeFigureOut">
               <a:rPr lang="es-AR" smtClean="0"/>
-              <a:t>7/10/2025</a:t>
+              <a:t>9/10/2025</a:t>
             </a:fld>
             <a:endParaRPr lang="es-AR"/>
           </a:p>
@@ -16356,7 +17009,7 @@
           <a:p>
             <a:fld id="{602571BD-3D54-40D5-A404-DFC2E61383C4}" type="datetimeFigureOut">
               <a:rPr lang="es-AR" smtClean="0"/>
-              <a:t>7/10/2025</a:t>
+              <a:t>9/10/2025</a:t>
             </a:fld>
             <a:endParaRPr lang="es-AR"/>
           </a:p>
@@ -16632,7 +17285,7 @@
           <a:p>
             <a:fld id="{602571BD-3D54-40D5-A404-DFC2E61383C4}" type="datetimeFigureOut">
               <a:rPr lang="es-AR" smtClean="0"/>
-              <a:t>7/10/2025</a:t>
+              <a:t>9/10/2025</a:t>
             </a:fld>
             <a:endParaRPr lang="es-AR"/>
           </a:p>
@@ -16900,7 +17553,7 @@
           <a:p>
             <a:fld id="{602571BD-3D54-40D5-A404-DFC2E61383C4}" type="datetimeFigureOut">
               <a:rPr lang="es-AR" smtClean="0"/>
-              <a:t>7/10/2025</a:t>
+              <a:t>9/10/2025</a:t>
             </a:fld>
             <a:endParaRPr lang="es-AR"/>
           </a:p>
@@ -17315,7 +17968,7 @@
           <a:p>
             <a:fld id="{602571BD-3D54-40D5-A404-DFC2E61383C4}" type="datetimeFigureOut">
               <a:rPr lang="es-AR" smtClean="0"/>
-              <a:t>7/10/2025</a:t>
+              <a:t>9/10/2025</a:t>
             </a:fld>
             <a:endParaRPr lang="es-AR"/>
           </a:p>
@@ -17457,7 +18110,7 @@
           <a:p>
             <a:fld id="{602571BD-3D54-40D5-A404-DFC2E61383C4}" type="datetimeFigureOut">
               <a:rPr lang="es-AR" smtClean="0"/>
-              <a:t>7/10/2025</a:t>
+              <a:t>9/10/2025</a:t>
             </a:fld>
             <a:endParaRPr lang="es-AR"/>
           </a:p>
@@ -17570,7 +18223,7 @@
           <a:p>
             <a:fld id="{602571BD-3D54-40D5-A404-DFC2E61383C4}" type="datetimeFigureOut">
               <a:rPr lang="es-AR" smtClean="0"/>
-              <a:t>7/10/2025</a:t>
+              <a:t>9/10/2025</a:t>
             </a:fld>
             <a:endParaRPr lang="es-AR"/>
           </a:p>
@@ -17883,7 +18536,7 @@
           <a:p>
             <a:fld id="{602571BD-3D54-40D5-A404-DFC2E61383C4}" type="datetimeFigureOut">
               <a:rPr lang="es-AR" smtClean="0"/>
-              <a:t>7/10/2025</a:t>
+              <a:t>9/10/2025</a:t>
             </a:fld>
             <a:endParaRPr lang="es-AR"/>
           </a:p>
@@ -18172,7 +18825,7 @@
           <a:p>
             <a:fld id="{602571BD-3D54-40D5-A404-DFC2E61383C4}" type="datetimeFigureOut">
               <a:rPr lang="es-AR" smtClean="0"/>
-              <a:t>7/10/2025</a:t>
+              <a:t>9/10/2025</a:t>
             </a:fld>
             <a:endParaRPr lang="es-AR"/>
           </a:p>
@@ -18415,7 +19068,7 @@
           <a:p>
             <a:fld id="{602571BD-3D54-40D5-A404-DFC2E61383C4}" type="datetimeFigureOut">
               <a:rPr lang="es-AR" smtClean="0"/>
-              <a:t>7/10/2025</a:t>
+              <a:t>9/10/2025</a:t>
             </a:fld>
             <a:endParaRPr lang="es-AR"/>
           </a:p>
@@ -29325,7 +29978,7 @@
                 </a:pathLst>
               </a:custGeom>
               <a:blipFill>
-                <a:blip r:embed="rId2">
+                <a:blip r:embed="rId3">
                   <a:alphaModFix amt="57000"/>
                 </a:blip>
                 <a:tile tx="0" ty="0" sx="100000" sy="100000" flip="none" algn="tl"/>
@@ -29388,66 +30041,26 @@
         </p:spPr>
         <p:txBody>
           <a:bodyPr>
-            <a:normAutofit/>
+            <a:normAutofit fontScale="90000"/>
           </a:bodyPr>
           <a:lstStyle/>
           <a:p>
             <a:pPr algn="l"/>
             <a:r>
-              <a:rPr lang="fr-FR" sz="4000" dirty="0">
+              <a:rPr lang="en-US" sz="4000" i="1" dirty="0">
                 <a:solidFill>
                   <a:schemeClr val="bg1"/>
                 </a:solidFill>
               </a:rPr>
-              <a:t>Présentation de l’article : </a:t>
+              <a:t>Enhanced Automated Construction Quantity Takeoff: Integrating LLMs with Data Extraction, Symbol Mapping, and Rule-based Reasoning</a:t>
             </a:r>
             <a:r>
-              <a:rPr lang="fr-FR" sz="4000" dirty="0" err="1">
+              <a:rPr lang="en-US" sz="4000" dirty="0">
                 <a:solidFill>
                   <a:schemeClr val="bg1"/>
                 </a:solidFill>
               </a:rPr>
-              <a:t>Enhanced</a:t>
-            </a:r>
-            <a:r>
-              <a:rPr lang="fr-FR" sz="4000" dirty="0">
-                <a:solidFill>
-                  <a:schemeClr val="bg1"/>
-                </a:solidFill>
-              </a:rPr>
-              <a:t> </a:t>
-            </a:r>
-            <a:r>
-              <a:rPr lang="fr-FR" sz="4000" dirty="0" err="1">
-                <a:solidFill>
-                  <a:schemeClr val="bg1"/>
-                </a:solidFill>
-              </a:rPr>
-              <a:t>Automated</a:t>
-            </a:r>
-            <a:r>
-              <a:rPr lang="fr-FR" sz="4000" dirty="0">
-                <a:solidFill>
-                  <a:schemeClr val="bg1"/>
-                </a:solidFill>
-              </a:rPr>
-              <a:t> Construction </a:t>
-            </a:r>
-            <a:r>
-              <a:rPr lang="fr-FR" sz="4000" dirty="0" err="1">
-                <a:solidFill>
-                  <a:schemeClr val="bg1"/>
-                </a:solidFill>
-              </a:rPr>
-              <a:t>Quantity</a:t>
-            </a:r>
-            <a:r>
-              <a:rPr lang="fr-FR" sz="4000" dirty="0">
-                <a:solidFill>
-                  <a:schemeClr val="bg1"/>
-                </a:solidFill>
-              </a:rPr>
-              <a:t> Takeoff</a:t>
+              <a:t>.</a:t>
             </a:r>
             <a:endParaRPr lang="es-AR" sz="4000" dirty="0">
               <a:ln w="22225">
@@ -29593,12 +30206,12 @@
           <a:chExt cx="0" cy="0"/>
         </a:xfrm>
       </p:grpSpPr>
-      <p:sp useBgFill="1">
+      <p:sp>
         <p:nvSpPr>
-          <p:cNvPr id="10" name="Rectangle 9">
+          <p:cNvPr id="10" name="Down Arrow 7">
             <a:extLst>
               <a:ext uri="{FF2B5EF4-FFF2-40B4-BE49-F238E27FC236}">
-                <a16:creationId xmlns:a16="http://schemas.microsoft.com/office/drawing/2014/main" id="{AB8C311F-7253-4AED-9701-7FC0708C41C7}"/>
+                <a16:creationId xmlns:a16="http://schemas.microsoft.com/office/drawing/2014/main" id="{D4771268-CB57-404A-9271-370EB28F6090}"/>
               </a:ext>
               <a:ext uri="{C183D7F6-B498-43B3-948B-1728B52AA6E4}">
                 <adec:decorative xmlns:adec="http://schemas.microsoft.com/office/drawing/2017/decorative" val="1"/>
@@ -29617,103 +30230,20 @@
           </p:nvPr>
         </p:nvSpPr>
         <p:spPr>
-          <a:xfrm>
-            <a:off x="0" y="0"/>
-            <a:ext cx="12192000" cy="6858000"/>
+          <a:xfrm rot="16200000">
+            <a:off x="800100" y="1491343"/>
+            <a:ext cx="3333749" cy="3499103"/>
           </a:xfrm>
-          <a:prstGeom prst="rect">
-            <a:avLst/>
+          <a:prstGeom prst="downArrow">
+            <a:avLst>
+              <a:gd name="adj1" fmla="val 100000"/>
+              <a:gd name="adj2" fmla="val 15788"/>
+            </a:avLst>
           </a:prstGeom>
-          <a:ln w="12700" cap="flat" cmpd="sng" algn="ctr">
-            <a:noFill/>
-            <a:prstDash val="solid"/>
-            <a:miter lim="800000"/>
-          </a:ln>
-          <a:effectLst/>
-          <a:extLst>
-            <a:ext uri="{91240B29-F687-4F45-9708-019B960494DF}">
-              <a14:hiddenLine xmlns:a14="http://schemas.microsoft.com/office/drawing/2010/main" w="12700" cap="flat" cmpd="sng" algn="ctr">
-                <a:solidFill>
-                  <a:schemeClr val="accent1">
-                    <a:shade val="50000"/>
-                  </a:schemeClr>
-                </a:solidFill>
-                <a:prstDash val="solid"/>
-                <a:miter lim="800000"/>
-              </a14:hiddenLine>
-            </a:ext>
-          </a:extLst>
-        </p:spPr>
-        <p:style>
-          <a:lnRef idx="2">
-            <a:schemeClr val="accent1">
-              <a:shade val="50000"/>
-            </a:schemeClr>
-          </a:lnRef>
-          <a:fillRef idx="1">
-            <a:schemeClr val="accent1"/>
-          </a:fillRef>
-          <a:effectRef idx="0">
-            <a:schemeClr val="accent1"/>
-          </a:effectRef>
-          <a:fontRef idx="minor">
-            <a:schemeClr val="lt1"/>
-          </a:fontRef>
-        </p:style>
-        <p:txBody>
-          <a:bodyPr rtlCol="0" anchor="ctr"/>
-          <a:lstStyle/>
-          <a:p>
-            <a:pPr algn="ctr"/>
-            <a:endParaRPr lang="en-US"/>
-          </a:p>
-        </p:txBody>
-      </p:sp>
-      <p:sp>
-        <p:nvSpPr>
-          <p:cNvPr id="12" name="Rectangle 11">
-            <a:extLst>
-              <a:ext uri="{FF2B5EF4-FFF2-40B4-BE49-F238E27FC236}">
-                <a16:creationId xmlns:a16="http://schemas.microsoft.com/office/drawing/2014/main" id="{E2384209-CB15-4CDF-9D31-C44FD9A3F20D}"/>
-              </a:ext>
-              <a:ext uri="{C183D7F6-B498-43B3-948B-1728B52AA6E4}">
-                <adec:decorative xmlns:adec="http://schemas.microsoft.com/office/drawing/2017/decorative" val="1"/>
-              </a:ext>
-            </a:extLst>
-          </p:cNvPr>
-          <p:cNvSpPr>
-            <a:spLocks noGrp="1" noRot="1" noChangeAspect="1" noMove="1" noResize="1" noEditPoints="1" noAdjustHandles="1" noChangeArrowheads="1" noChangeShapeType="1" noTextEdit="1"/>
-          </p:cNvSpPr>
-          <p:nvPr>
-            <p:extLst>
-              <p:ext uri="{386F3935-93C4-4BCD-93E2-E3B085C9AB24}">
-                <p16:designElem xmlns:p16="http://schemas.microsoft.com/office/powerpoint/2015/main" val="1"/>
-              </p:ext>
-            </p:extLst>
-          </p:nvPr>
-        </p:nvSpPr>
-        <p:spPr>
-          <a:xfrm rot="16200000" flipH="1">
-            <a:off x="2666617" y="-2666188"/>
-            <a:ext cx="6858000" cy="12191233"/>
-          </a:xfrm>
-          <a:prstGeom prst="rect">
-            <a:avLst/>
-          </a:prstGeom>
-          <a:gradFill>
-            <a:gsLst>
-              <a:gs pos="8000">
-                <a:schemeClr val="accent1"/>
-              </a:gs>
-              <a:gs pos="100000">
-                <a:schemeClr val="accent1">
-                  <a:lumMod val="50000"/>
-                </a:schemeClr>
-              </a:gs>
-            </a:gsLst>
-            <a:lin ang="12000000" scaled="0"/>
-          </a:gradFill>
-          <a:ln>
+          <a:solidFill>
+            <a:srgbClr val="404040"/>
+          </a:solidFill>
+          <a:ln w="53975">
             <a:noFill/>
           </a:ln>
         </p:spPr>
@@ -29744,188 +30274,87 @@
       </p:sp>
       <p:sp>
         <p:nvSpPr>
-          <p:cNvPr id="14" name="Rectangle 13">
+          <p:cNvPr id="2" name="Titre 1">
             <a:extLst>
               <a:ext uri="{FF2B5EF4-FFF2-40B4-BE49-F238E27FC236}">
-                <a16:creationId xmlns:a16="http://schemas.microsoft.com/office/drawing/2014/main" id="{2633B3B5-CC90-43F0-8714-D31D1F3F0209}"/>
-              </a:ext>
-              <a:ext uri="{C183D7F6-B498-43B3-948B-1728B52AA6E4}">
-                <adec:decorative xmlns:adec="http://schemas.microsoft.com/office/drawing/2017/decorative" val="1"/>
+                <a16:creationId xmlns:a16="http://schemas.microsoft.com/office/drawing/2014/main" id="{112ED631-1418-94FD-8D13-C14A04FE1E80}"/>
               </a:ext>
             </a:extLst>
           </p:cNvPr>
           <p:cNvSpPr>
-            <a:spLocks noGrp="1" noRot="1" noChangeAspect="1" noMove="1" noResize="1" noEditPoints="1" noAdjustHandles="1" noChangeArrowheads="1" noChangeShapeType="1" noTextEdit="1"/>
+            <a:spLocks noGrp="1"/>
           </p:cNvSpPr>
           <p:nvPr>
-            <p:extLst>
-              <p:ext uri="{386F3935-93C4-4BCD-93E2-E3B085C9AB24}">
-                <p16:designElem xmlns:p16="http://schemas.microsoft.com/office/powerpoint/2015/main" val="1"/>
-              </p:ext>
-            </p:extLst>
+            <p:ph type="title"/>
           </p:nvPr>
         </p:nvSpPr>
         <p:spPr>
-          <a:xfrm rot="10800000" flipH="1">
-            <a:off x="-2311" y="0"/>
-            <a:ext cx="9070846" cy="6857572"/>
+          <a:xfrm>
+            <a:off x="1028700" y="1967266"/>
+            <a:ext cx="2628900" cy="2547257"/>
           </a:xfrm>
-          <a:prstGeom prst="rect">
-            <a:avLst/>
-          </a:prstGeom>
-          <a:gradFill>
-            <a:gsLst>
-              <a:gs pos="8000">
-                <a:srgbClr val="000000">
-                  <a:alpha val="52000"/>
-                </a:srgbClr>
-              </a:gs>
-              <a:gs pos="100000">
-                <a:schemeClr val="accent1"/>
-              </a:gs>
-            </a:gsLst>
-            <a:lin ang="4800000" scaled="0"/>
-          </a:gradFill>
-          <a:ln>
-            <a:noFill/>
-          </a:ln>
+          <a:noFill/>
         </p:spPr>
-        <p:style>
-          <a:lnRef idx="2">
-            <a:schemeClr val="accent1">
-              <a:shade val="50000"/>
-            </a:schemeClr>
-          </a:lnRef>
-          <a:fillRef idx="1">
-            <a:schemeClr val="accent1"/>
-          </a:fillRef>
-          <a:effectRef idx="0">
-            <a:schemeClr val="accent1"/>
-          </a:effectRef>
-          <a:fontRef idx="minor">
-            <a:schemeClr val="lt1"/>
-          </a:fontRef>
-        </p:style>
         <p:txBody>
-          <a:bodyPr rtlCol="0" anchor="ctr"/>
+          <a:bodyPr vert="horz" lIns="91440" tIns="45720" rIns="91440" bIns="45720" rtlCol="0" anchor="ctr">
+            <a:normAutofit/>
+          </a:bodyPr>
           <a:lstStyle/>
           <a:p>
             <a:pPr algn="ctr"/>
-            <a:endParaRPr lang="en-US"/>
-          </a:p>
-        </p:txBody>
-      </p:sp>
-      <p:sp>
-        <p:nvSpPr>
-          <p:cNvPr id="16" name="Rectangle 15">
-            <a:extLst>
-              <a:ext uri="{FF2B5EF4-FFF2-40B4-BE49-F238E27FC236}">
-                <a16:creationId xmlns:a16="http://schemas.microsoft.com/office/drawing/2014/main" id="{A8D57A06-A426-446D-B02C-A2DC6B62E45E}"/>
-              </a:ext>
-              <a:ext uri="{C183D7F6-B498-43B3-948B-1728B52AA6E4}">
-                <adec:decorative xmlns:adec="http://schemas.microsoft.com/office/drawing/2017/decorative" val="1"/>
-              </a:ext>
-            </a:extLst>
-          </p:cNvPr>
-          <p:cNvSpPr>
-            <a:spLocks noGrp="1" noRot="1" noChangeAspect="1" noMove="1" noResize="1" noEditPoints="1" noAdjustHandles="1" noChangeArrowheads="1" noChangeShapeType="1" noTextEdit="1"/>
-          </p:cNvSpPr>
-          <p:nvPr>
-            <p:extLst>
-              <p:ext uri="{386F3935-93C4-4BCD-93E2-E3B085C9AB24}">
-                <p16:designElem xmlns:p16="http://schemas.microsoft.com/office/powerpoint/2015/main" val="1"/>
-              </p:ext>
-            </p:extLst>
-          </p:nvPr>
-        </p:nvSpPr>
-        <p:spPr>
-          <a:xfrm rot="16200000" flipH="1">
-            <a:off x="3649491" y="-1685840"/>
-            <a:ext cx="4894564" cy="12193546"/>
-          </a:xfrm>
-          <a:prstGeom prst="rect">
-            <a:avLst/>
-          </a:prstGeom>
-          <a:gradFill>
-            <a:gsLst>
-              <a:gs pos="0">
-                <a:schemeClr val="accent5">
-                  <a:lumMod val="60000"/>
-                  <a:lumOff val="40000"/>
-                  <a:alpha val="0"/>
-                </a:schemeClr>
-              </a:gs>
-              <a:gs pos="100000">
-                <a:srgbClr val="000000">
-                  <a:alpha val="46000"/>
-                </a:srgbClr>
-              </a:gs>
-            </a:gsLst>
-            <a:lin ang="1200000" scaled="0"/>
-          </a:gradFill>
-          <a:ln>
-            <a:noFill/>
-          </a:ln>
-        </p:spPr>
-        <p:style>
-          <a:lnRef idx="2">
-            <a:schemeClr val="accent1">
-              <a:shade val="50000"/>
-            </a:schemeClr>
-          </a:lnRef>
-          <a:fillRef idx="1">
-            <a:schemeClr val="accent1"/>
-          </a:fillRef>
-          <a:effectRef idx="0">
-            <a:schemeClr val="accent1"/>
-          </a:effectRef>
-          <a:fontRef idx="minor">
-            <a:schemeClr val="lt1"/>
-          </a:fontRef>
-        </p:style>
-        <p:txBody>
-          <a:bodyPr rtlCol="0" anchor="ctr"/>
-          <a:lstStyle/>
-          <a:p>
-            <a:pPr algn="ctr"/>
-            <a:endParaRPr lang="en-US"/>
+            <a:r>
+              <a:rPr lang="en-US" sz="3600" kern="1200">
+                <a:solidFill>
+                  <a:srgbClr val="FFFFFF"/>
+                </a:solidFill>
+                <a:latin typeface="+mj-lt"/>
+                <a:ea typeface="+mj-ea"/>
+                <a:cs typeface="+mj-cs"/>
+              </a:rPr>
+              <a:t>Exemple de promp template</a:t>
+            </a:r>
           </a:p>
         </p:txBody>
       </p:sp>
       <p:pic>
         <p:nvPicPr>
-          <p:cNvPr id="5" name="Image 4">
+          <p:cNvPr id="12" name="Espace réservé du contenu 11" descr="Une image contenant texte, capture d’écran, Police&#10;&#10;Le contenu généré par l’IA peut être incorrect.">
             <a:extLst>
               <a:ext uri="{FF2B5EF4-FFF2-40B4-BE49-F238E27FC236}">
-                <a16:creationId xmlns:a16="http://schemas.microsoft.com/office/drawing/2014/main" id="{C83016AD-8200-43A2-95FA-655D4EF44AF3}"/>
+                <a16:creationId xmlns:a16="http://schemas.microsoft.com/office/drawing/2014/main" id="{B515FF5F-C16C-C2A6-22B2-93D95E095AE1}"/>
               </a:ext>
             </a:extLst>
           </p:cNvPr>
           <p:cNvPicPr>
-            <a:picLocks noChangeAspect="1"/>
+            <a:picLocks noGrp="1" noChangeAspect="1"/>
           </p:cNvPicPr>
-          <p:nvPr/>
+          <p:nvPr>
+            <p:ph idx="1"/>
+          </p:nvPr>
         </p:nvPicPr>
         <p:blipFill>
-          <a:blip r:embed="rId2"/>
+          <a:blip r:embed="rId2">
+            <a:extLst>
+              <a:ext uri="{28A0092B-C50C-407E-A947-70E740481C1C}">
+                <a14:useLocalDpi xmlns:a14="http://schemas.microsoft.com/office/drawing/2010/main" val="0"/>
+              </a:ext>
+            </a:extLst>
+          </a:blip>
           <a:stretch>
             <a:fillRect/>
           </a:stretch>
         </p:blipFill>
         <p:spPr>
           <a:xfrm>
-            <a:off x="1895575" y="457200"/>
-            <a:ext cx="8400849" cy="5943600"/>
+            <a:off x="5120109" y="1065225"/>
+            <a:ext cx="6102172" cy="4351338"/>
           </a:xfrm>
-          <a:prstGeom prst="rect">
-            <a:avLst/>
-          </a:prstGeom>
         </p:spPr>
       </p:pic>
     </p:spTree>
     <p:extLst>
       <p:ext uri="{BB962C8B-B14F-4D97-AF65-F5344CB8AC3E}">
-        <p14:creationId xmlns:p14="http://schemas.microsoft.com/office/powerpoint/2010/main" val="313216496"/>
+        <p14:creationId xmlns:p14="http://schemas.microsoft.com/office/powerpoint/2010/main" val="1029414871"/>
       </p:ext>
     </p:extLst>
   </p:cSld>
@@ -30453,375 +30882,6 @@
 </file>
 
 <file path=ppt/slides/slide12.xml><?xml version="1.0" encoding="utf-8"?>
-<p:sld xmlns:a="http://schemas.openxmlformats.org/drawingml/2006/main" xmlns:r="http://schemas.openxmlformats.org/officeDocument/2006/relationships" xmlns:p="http://schemas.openxmlformats.org/presentationml/2006/main">
-  <p:cSld>
-    <p:bg>
-      <p:bgPr>
-        <a:solidFill>
-          <a:schemeClr val="bg1"/>
-        </a:solidFill>
-        <a:effectLst/>
-      </p:bgPr>
-    </p:bg>
-    <p:spTree>
-      <p:nvGrpSpPr>
-        <p:cNvPr id="1" name=""/>
-        <p:cNvGrpSpPr/>
-        <p:nvPr/>
-      </p:nvGrpSpPr>
-      <p:grpSpPr>
-        <a:xfrm>
-          <a:off x="0" y="0"/>
-          <a:ext cx="0" cy="0"/>
-          <a:chOff x="0" y="0"/>
-          <a:chExt cx="0" cy="0"/>
-        </a:xfrm>
-      </p:grpSpPr>
-      <p:sp useBgFill="1">
-        <p:nvSpPr>
-          <p:cNvPr id="10" name="Rectangle 9">
-            <a:extLst>
-              <a:ext uri="{FF2B5EF4-FFF2-40B4-BE49-F238E27FC236}">
-                <a16:creationId xmlns:a16="http://schemas.microsoft.com/office/drawing/2014/main" id="{AB8C311F-7253-4AED-9701-7FC0708C41C7}"/>
-              </a:ext>
-              <a:ext uri="{C183D7F6-B498-43B3-948B-1728B52AA6E4}">
-                <adec:decorative xmlns:adec="http://schemas.microsoft.com/office/drawing/2017/decorative" val="1"/>
-              </a:ext>
-            </a:extLst>
-          </p:cNvPr>
-          <p:cNvSpPr>
-            <a:spLocks noGrp="1" noRot="1" noChangeAspect="1" noMove="1" noResize="1" noEditPoints="1" noAdjustHandles="1" noChangeArrowheads="1" noChangeShapeType="1" noTextEdit="1"/>
-          </p:cNvSpPr>
-          <p:nvPr>
-            <p:extLst>
-              <p:ext uri="{386F3935-93C4-4BCD-93E2-E3B085C9AB24}">
-                <p16:designElem xmlns:p16="http://schemas.microsoft.com/office/powerpoint/2015/main" val="1"/>
-              </p:ext>
-            </p:extLst>
-          </p:nvPr>
-        </p:nvSpPr>
-        <p:spPr>
-          <a:xfrm>
-            <a:off x="0" y="0"/>
-            <a:ext cx="12192000" cy="6858000"/>
-          </a:xfrm>
-          <a:prstGeom prst="rect">
-            <a:avLst/>
-          </a:prstGeom>
-          <a:ln w="12700" cap="flat" cmpd="sng" algn="ctr">
-            <a:noFill/>
-            <a:prstDash val="solid"/>
-            <a:miter lim="800000"/>
-          </a:ln>
-          <a:effectLst/>
-          <a:extLst>
-            <a:ext uri="{91240B29-F687-4F45-9708-019B960494DF}">
-              <a14:hiddenLine xmlns:a14="http://schemas.microsoft.com/office/drawing/2010/main" w="12700" cap="flat" cmpd="sng" algn="ctr">
-                <a:solidFill>
-                  <a:schemeClr val="accent1">
-                    <a:shade val="50000"/>
-                  </a:schemeClr>
-                </a:solidFill>
-                <a:prstDash val="solid"/>
-                <a:miter lim="800000"/>
-              </a14:hiddenLine>
-            </a:ext>
-          </a:extLst>
-        </p:spPr>
-        <p:style>
-          <a:lnRef idx="2">
-            <a:schemeClr val="accent1">
-              <a:shade val="50000"/>
-            </a:schemeClr>
-          </a:lnRef>
-          <a:fillRef idx="1">
-            <a:schemeClr val="accent1"/>
-          </a:fillRef>
-          <a:effectRef idx="0">
-            <a:schemeClr val="accent1"/>
-          </a:effectRef>
-          <a:fontRef idx="minor">
-            <a:schemeClr val="lt1"/>
-          </a:fontRef>
-        </p:style>
-        <p:txBody>
-          <a:bodyPr rtlCol="0" anchor="ctr"/>
-          <a:lstStyle/>
-          <a:p>
-            <a:pPr algn="ctr"/>
-            <a:endParaRPr lang="en-US"/>
-          </a:p>
-        </p:txBody>
-      </p:sp>
-      <p:sp>
-        <p:nvSpPr>
-          <p:cNvPr id="12" name="Rectangle 11">
-            <a:extLst>
-              <a:ext uri="{FF2B5EF4-FFF2-40B4-BE49-F238E27FC236}">
-                <a16:creationId xmlns:a16="http://schemas.microsoft.com/office/drawing/2014/main" id="{E2384209-CB15-4CDF-9D31-C44FD9A3F20D}"/>
-              </a:ext>
-              <a:ext uri="{C183D7F6-B498-43B3-948B-1728B52AA6E4}">
-                <adec:decorative xmlns:adec="http://schemas.microsoft.com/office/drawing/2017/decorative" val="1"/>
-              </a:ext>
-            </a:extLst>
-          </p:cNvPr>
-          <p:cNvSpPr>
-            <a:spLocks noGrp="1" noRot="1" noChangeAspect="1" noMove="1" noResize="1" noEditPoints="1" noAdjustHandles="1" noChangeArrowheads="1" noChangeShapeType="1" noTextEdit="1"/>
-          </p:cNvSpPr>
-          <p:nvPr>
-            <p:extLst>
-              <p:ext uri="{386F3935-93C4-4BCD-93E2-E3B085C9AB24}">
-                <p16:designElem xmlns:p16="http://schemas.microsoft.com/office/powerpoint/2015/main" val="1"/>
-              </p:ext>
-            </p:extLst>
-          </p:nvPr>
-        </p:nvSpPr>
-        <p:spPr>
-          <a:xfrm rot="16200000" flipH="1">
-            <a:off x="2666617" y="-2666188"/>
-            <a:ext cx="6858000" cy="12191233"/>
-          </a:xfrm>
-          <a:prstGeom prst="rect">
-            <a:avLst/>
-          </a:prstGeom>
-          <a:gradFill>
-            <a:gsLst>
-              <a:gs pos="8000">
-                <a:schemeClr val="accent1"/>
-              </a:gs>
-              <a:gs pos="100000">
-                <a:schemeClr val="accent1">
-                  <a:lumMod val="50000"/>
-                </a:schemeClr>
-              </a:gs>
-            </a:gsLst>
-            <a:lin ang="12000000" scaled="0"/>
-          </a:gradFill>
-          <a:ln>
-            <a:noFill/>
-          </a:ln>
-        </p:spPr>
-        <p:style>
-          <a:lnRef idx="2">
-            <a:schemeClr val="accent1">
-              <a:shade val="50000"/>
-            </a:schemeClr>
-          </a:lnRef>
-          <a:fillRef idx="1">
-            <a:schemeClr val="accent1"/>
-          </a:fillRef>
-          <a:effectRef idx="0">
-            <a:schemeClr val="accent1"/>
-          </a:effectRef>
-          <a:fontRef idx="minor">
-            <a:schemeClr val="lt1"/>
-          </a:fontRef>
-        </p:style>
-        <p:txBody>
-          <a:bodyPr rtlCol="0" anchor="ctr"/>
-          <a:lstStyle/>
-          <a:p>
-            <a:pPr algn="ctr"/>
-            <a:endParaRPr lang="en-US"/>
-          </a:p>
-        </p:txBody>
-      </p:sp>
-      <p:sp>
-        <p:nvSpPr>
-          <p:cNvPr id="14" name="Rectangle 13">
-            <a:extLst>
-              <a:ext uri="{FF2B5EF4-FFF2-40B4-BE49-F238E27FC236}">
-                <a16:creationId xmlns:a16="http://schemas.microsoft.com/office/drawing/2014/main" id="{2633B3B5-CC90-43F0-8714-D31D1F3F0209}"/>
-              </a:ext>
-              <a:ext uri="{C183D7F6-B498-43B3-948B-1728B52AA6E4}">
-                <adec:decorative xmlns:adec="http://schemas.microsoft.com/office/drawing/2017/decorative" val="1"/>
-              </a:ext>
-            </a:extLst>
-          </p:cNvPr>
-          <p:cNvSpPr>
-            <a:spLocks noGrp="1" noRot="1" noChangeAspect="1" noMove="1" noResize="1" noEditPoints="1" noAdjustHandles="1" noChangeArrowheads="1" noChangeShapeType="1" noTextEdit="1"/>
-          </p:cNvSpPr>
-          <p:nvPr>
-            <p:extLst>
-              <p:ext uri="{386F3935-93C4-4BCD-93E2-E3B085C9AB24}">
-                <p16:designElem xmlns:p16="http://schemas.microsoft.com/office/powerpoint/2015/main" val="1"/>
-              </p:ext>
-            </p:extLst>
-          </p:nvPr>
-        </p:nvSpPr>
-        <p:spPr>
-          <a:xfrm rot="10800000" flipH="1">
-            <a:off x="-2311" y="0"/>
-            <a:ext cx="9070846" cy="6857572"/>
-          </a:xfrm>
-          <a:prstGeom prst="rect">
-            <a:avLst/>
-          </a:prstGeom>
-          <a:gradFill>
-            <a:gsLst>
-              <a:gs pos="8000">
-                <a:srgbClr val="000000">
-                  <a:alpha val="52000"/>
-                </a:srgbClr>
-              </a:gs>
-              <a:gs pos="100000">
-                <a:schemeClr val="accent1"/>
-              </a:gs>
-            </a:gsLst>
-            <a:lin ang="4800000" scaled="0"/>
-          </a:gradFill>
-          <a:ln>
-            <a:noFill/>
-          </a:ln>
-        </p:spPr>
-        <p:style>
-          <a:lnRef idx="2">
-            <a:schemeClr val="accent1">
-              <a:shade val="50000"/>
-            </a:schemeClr>
-          </a:lnRef>
-          <a:fillRef idx="1">
-            <a:schemeClr val="accent1"/>
-          </a:fillRef>
-          <a:effectRef idx="0">
-            <a:schemeClr val="accent1"/>
-          </a:effectRef>
-          <a:fontRef idx="minor">
-            <a:schemeClr val="lt1"/>
-          </a:fontRef>
-        </p:style>
-        <p:txBody>
-          <a:bodyPr rtlCol="0" anchor="ctr"/>
-          <a:lstStyle/>
-          <a:p>
-            <a:pPr algn="ctr"/>
-            <a:endParaRPr lang="en-US"/>
-          </a:p>
-        </p:txBody>
-      </p:sp>
-      <p:sp>
-        <p:nvSpPr>
-          <p:cNvPr id="16" name="Rectangle 15">
-            <a:extLst>
-              <a:ext uri="{FF2B5EF4-FFF2-40B4-BE49-F238E27FC236}">
-                <a16:creationId xmlns:a16="http://schemas.microsoft.com/office/drawing/2014/main" id="{A8D57A06-A426-446D-B02C-A2DC6B62E45E}"/>
-              </a:ext>
-              <a:ext uri="{C183D7F6-B498-43B3-948B-1728B52AA6E4}">
-                <adec:decorative xmlns:adec="http://schemas.microsoft.com/office/drawing/2017/decorative" val="1"/>
-              </a:ext>
-            </a:extLst>
-          </p:cNvPr>
-          <p:cNvSpPr>
-            <a:spLocks noGrp="1" noRot="1" noChangeAspect="1" noMove="1" noResize="1" noEditPoints="1" noAdjustHandles="1" noChangeArrowheads="1" noChangeShapeType="1" noTextEdit="1"/>
-          </p:cNvSpPr>
-          <p:nvPr>
-            <p:extLst>
-              <p:ext uri="{386F3935-93C4-4BCD-93E2-E3B085C9AB24}">
-                <p16:designElem xmlns:p16="http://schemas.microsoft.com/office/powerpoint/2015/main" val="1"/>
-              </p:ext>
-            </p:extLst>
-          </p:nvPr>
-        </p:nvSpPr>
-        <p:spPr>
-          <a:xfrm rot="16200000" flipH="1">
-            <a:off x="3649491" y="-1685840"/>
-            <a:ext cx="4894564" cy="12193546"/>
-          </a:xfrm>
-          <a:prstGeom prst="rect">
-            <a:avLst/>
-          </a:prstGeom>
-          <a:gradFill>
-            <a:gsLst>
-              <a:gs pos="0">
-                <a:schemeClr val="accent5">
-                  <a:lumMod val="60000"/>
-                  <a:lumOff val="40000"/>
-                  <a:alpha val="0"/>
-                </a:schemeClr>
-              </a:gs>
-              <a:gs pos="100000">
-                <a:srgbClr val="000000">
-                  <a:alpha val="46000"/>
-                </a:srgbClr>
-              </a:gs>
-            </a:gsLst>
-            <a:lin ang="1200000" scaled="0"/>
-          </a:gradFill>
-          <a:ln>
-            <a:noFill/>
-          </a:ln>
-        </p:spPr>
-        <p:style>
-          <a:lnRef idx="2">
-            <a:schemeClr val="accent1">
-              <a:shade val="50000"/>
-            </a:schemeClr>
-          </a:lnRef>
-          <a:fillRef idx="1">
-            <a:schemeClr val="accent1"/>
-          </a:fillRef>
-          <a:effectRef idx="0">
-            <a:schemeClr val="accent1"/>
-          </a:effectRef>
-          <a:fontRef idx="minor">
-            <a:schemeClr val="lt1"/>
-          </a:fontRef>
-        </p:style>
-        <p:txBody>
-          <a:bodyPr rtlCol="0" anchor="ctr"/>
-          <a:lstStyle/>
-          <a:p>
-            <a:pPr algn="ctr"/>
-            <a:endParaRPr lang="en-US"/>
-          </a:p>
-        </p:txBody>
-      </p:sp>
-      <p:pic>
-        <p:nvPicPr>
-          <p:cNvPr id="5" name="Espace réservé du contenu 4" descr="Une image contenant texte, capture d’écran, diagramme, Plan&#10;&#10;Le contenu généré par l’IA peut être incorrect.">
-            <a:extLst>
-              <a:ext uri="{FF2B5EF4-FFF2-40B4-BE49-F238E27FC236}">
-                <a16:creationId xmlns:a16="http://schemas.microsoft.com/office/drawing/2014/main" id="{813F5C5D-5212-42BB-893F-5DE461CB6EFD}"/>
-              </a:ext>
-            </a:extLst>
-          </p:cNvPr>
-          <p:cNvPicPr>
-            <a:picLocks noGrp="1" noChangeAspect="1"/>
-          </p:cNvPicPr>
-          <p:nvPr>
-            <p:ph idx="1"/>
-          </p:nvPr>
-        </p:nvPicPr>
-        <p:blipFill>
-          <a:blip r:embed="rId2"/>
-          <a:stretch>
-            <a:fillRect/>
-          </a:stretch>
-        </p:blipFill>
-        <p:spPr>
-          <a:xfrm>
-            <a:off x="2198557" y="457200"/>
-            <a:ext cx="7794886" cy="5943600"/>
-          </a:xfrm>
-          <a:prstGeom prst="rect">
-            <a:avLst/>
-          </a:prstGeom>
-        </p:spPr>
-      </p:pic>
-    </p:spTree>
-    <p:extLst>
-      <p:ext uri="{BB962C8B-B14F-4D97-AF65-F5344CB8AC3E}">
-        <p14:creationId xmlns:p14="http://schemas.microsoft.com/office/powerpoint/2010/main" val="2030295093"/>
-      </p:ext>
-    </p:extLst>
-  </p:cSld>
-  <p:clrMapOvr>
-    <a:masterClrMapping/>
-  </p:clrMapOvr>
-</p:sld>
-</file>
-
-<file path=ppt/slides/slide13.xml><?xml version="1.0" encoding="utf-8"?>
 <p:sld xmlns:a="http://schemas.openxmlformats.org/drawingml/2006/main" xmlns:r="http://schemas.openxmlformats.org/officeDocument/2006/relationships" xmlns:p="http://schemas.openxmlformats.org/presentationml/2006/main">
   <p:cSld>
     <p:bg>
@@ -31588,49 +31648,13 @@
                 <a:ea typeface="+mn-ea"/>
                 <a:cs typeface="+mn-cs"/>
               </a:rPr>
-              <a:t> </a:t>
+              <a:t> reels</a:t>
             </a:r>
             <a:r>
-              <a:rPr lang="en-US" sz="2400" kern="1200" dirty="0" err="1">
+              <a:rPr lang="en-US" sz="2400" dirty="0">
                 <a:solidFill>
                   <a:srgbClr val="FFFFFF"/>
                 </a:solidFill>
-                <a:latin typeface="+mn-lt"/>
-                <a:ea typeface="+mn-ea"/>
-                <a:cs typeface="+mn-cs"/>
-              </a:rPr>
-              <a:t>réels</a:t>
-            </a:r>
-            <a:r>
-              <a:rPr lang="en-US" sz="2400" kern="1200" dirty="0">
-                <a:solidFill>
-                  <a:srgbClr val="FFFFFF"/>
-                </a:solidFill>
-                <a:latin typeface="+mn-lt"/>
-                <a:ea typeface="+mn-ea"/>
-                <a:cs typeface="+mn-cs"/>
-              </a:rPr>
-              <a:t> sur des </a:t>
-            </a:r>
-            <a:r>
-              <a:rPr lang="en-US" sz="2400" kern="1200" dirty="0" err="1">
-                <a:solidFill>
-                  <a:srgbClr val="FFFFFF"/>
-                </a:solidFill>
-                <a:latin typeface="+mn-lt"/>
-                <a:ea typeface="+mn-ea"/>
-                <a:cs typeface="+mn-cs"/>
-              </a:rPr>
-              <a:t>cas</a:t>
-            </a:r>
-            <a:r>
-              <a:rPr lang="en-US" sz="2400" kern="1200" dirty="0">
-                <a:solidFill>
-                  <a:srgbClr val="FFFFFF"/>
-                </a:solidFill>
-                <a:latin typeface="+mn-lt"/>
-                <a:ea typeface="+mn-ea"/>
-                <a:cs typeface="+mn-cs"/>
               </a:rPr>
               <a:t> </a:t>
             </a:r>
@@ -31694,7 +31718,7 @@
 </p:sld>
 </file>
 
-<file path=ppt/slides/slide14.xml><?xml version="1.0" encoding="utf-8"?>
+<file path=ppt/slides/slide13.xml><?xml version="1.0" encoding="utf-8"?>
 <p:sld xmlns:a="http://schemas.openxmlformats.org/drawingml/2006/main" xmlns:r="http://schemas.openxmlformats.org/officeDocument/2006/relationships" xmlns:p="http://schemas.openxmlformats.org/presentationml/2006/main">
   <p:cSld>
     <p:bg>
@@ -33292,36 +33316,6 @@
           </p:style>
         </p:cxnSp>
       </p:grpSp>
-      <p:pic>
-        <p:nvPicPr>
-          <p:cNvPr id="5" name="Image 4">
-            <a:extLst>
-              <a:ext uri="{FF2B5EF4-FFF2-40B4-BE49-F238E27FC236}">
-                <a16:creationId xmlns:a16="http://schemas.microsoft.com/office/drawing/2014/main" id="{9001F4B3-51BD-328E-C90A-1FECC710ACA9}"/>
-              </a:ext>
-            </a:extLst>
-          </p:cNvPr>
-          <p:cNvPicPr>
-            <a:picLocks noChangeAspect="1"/>
-          </p:cNvPicPr>
-          <p:nvPr/>
-        </p:nvPicPr>
-        <p:blipFill>
-          <a:blip r:embed="rId3"/>
-          <a:stretch>
-            <a:fillRect/>
-          </a:stretch>
-        </p:blipFill>
-        <p:spPr>
-          <a:xfrm>
-            <a:off x="631359" y="3136043"/>
-            <a:ext cx="10843065" cy="2764982"/>
-          </a:xfrm>
-          <a:prstGeom prst="rect">
-            <a:avLst/>
-          </a:prstGeom>
-        </p:spPr>
-      </p:pic>
       <p:grpSp>
         <p:nvGrpSpPr>
           <p:cNvPr id="77" name="Group 76">
@@ -33582,6 +33576,42 @@
           </p:style>
         </p:cxnSp>
       </p:grpSp>
+      <p:pic>
+        <p:nvPicPr>
+          <p:cNvPr id="6" name="Image 5" descr="Une image contenant texte, reçu, capture d’écran, Police&#10;&#10;Le contenu généré par l’IA peut être incorrect.">
+            <a:extLst>
+              <a:ext uri="{FF2B5EF4-FFF2-40B4-BE49-F238E27FC236}">
+                <a16:creationId xmlns:a16="http://schemas.microsoft.com/office/drawing/2014/main" id="{25AE4C11-A207-666E-77FE-B58F506E725D}"/>
+              </a:ext>
+            </a:extLst>
+          </p:cNvPr>
+          <p:cNvPicPr>
+            <a:picLocks noChangeAspect="1"/>
+          </p:cNvPicPr>
+          <p:nvPr/>
+        </p:nvPicPr>
+        <p:blipFill>
+          <a:blip r:embed="rId3">
+            <a:extLst>
+              <a:ext uri="{28A0092B-C50C-407E-A947-70E740481C1C}">
+                <a14:useLocalDpi xmlns:a14="http://schemas.microsoft.com/office/drawing/2010/main" val="0"/>
+              </a:ext>
+            </a:extLst>
+          </a:blip>
+          <a:stretch>
+            <a:fillRect/>
+          </a:stretch>
+        </p:blipFill>
+        <p:spPr>
+          <a:xfrm>
+            <a:off x="656309" y="3358628"/>
+            <a:ext cx="10877550" cy="2762250"/>
+          </a:xfrm>
+          <a:prstGeom prst="rect">
+            <a:avLst/>
+          </a:prstGeom>
+        </p:spPr>
+      </p:pic>
     </p:spTree>
     <p:extLst>
       <p:ext uri="{BB962C8B-B14F-4D97-AF65-F5344CB8AC3E}">
@@ -33595,7 +33625,7 @@
 </p:sld>
 </file>
 
-<file path=ppt/slides/slide15.xml><?xml version="1.0" encoding="utf-8"?>
+<file path=ppt/slides/slide14.xml><?xml version="1.0" encoding="utf-8"?>
 <p:sld xmlns:a="http://schemas.openxmlformats.org/drawingml/2006/main" xmlns:r="http://schemas.openxmlformats.org/officeDocument/2006/relationships" xmlns:p="http://schemas.openxmlformats.org/presentationml/2006/main">
   <p:cSld>
     <p:bg>
@@ -33921,10 +33951,10 @@
       </p:sp>
       <p:pic>
         <p:nvPicPr>
-          <p:cNvPr id="5" name="Image 4">
+          <p:cNvPr id="3" name="Image 2" descr="Une image contenant texte, capture d’écran, diagramme, Police&#10;&#10;Le contenu généré par l’IA peut être incorrect.">
             <a:extLst>
               <a:ext uri="{FF2B5EF4-FFF2-40B4-BE49-F238E27FC236}">
-                <a16:creationId xmlns:a16="http://schemas.microsoft.com/office/drawing/2014/main" id="{0FCB5561-F7B9-9FEF-EADF-D9F89BE88688}"/>
+                <a16:creationId xmlns:a16="http://schemas.microsoft.com/office/drawing/2014/main" id="{E44D1CEB-BE76-07D8-AF9B-661AE9CB51EF}"/>
               </a:ext>
             </a:extLst>
           </p:cNvPr>
@@ -33934,15 +33964,21 @@
           <p:nvPr/>
         </p:nvPicPr>
         <p:blipFill>
-          <a:blip r:embed="rId2"/>
+          <a:blip r:embed="rId2">
+            <a:extLst>
+              <a:ext uri="{28A0092B-C50C-407E-A947-70E740481C1C}">
+                <a14:useLocalDpi xmlns:a14="http://schemas.microsoft.com/office/drawing/2010/main" val="0"/>
+              </a:ext>
+            </a:extLst>
+          </a:blip>
           <a:stretch>
             <a:fillRect/>
           </a:stretch>
         </p:blipFill>
         <p:spPr>
           <a:xfrm>
-            <a:off x="1996966" y="457200"/>
-            <a:ext cx="8198068" cy="5943600"/>
+            <a:off x="2000250" y="457200"/>
+            <a:ext cx="8191500" cy="5943600"/>
           </a:xfrm>
           <a:prstGeom prst="rect">
             <a:avLst/>
@@ -33962,7 +33998,7 @@
 </p:sld>
 </file>
 
-<file path=ppt/slides/slide16.xml><?xml version="1.0" encoding="utf-8"?>
+<file path=ppt/slides/slide15.xml><?xml version="1.0" encoding="utf-8"?>
 <p:sld xmlns:a="http://schemas.openxmlformats.org/drawingml/2006/main" xmlns:r="http://schemas.openxmlformats.org/officeDocument/2006/relationships" xmlns:p="http://schemas.openxmlformats.org/presentationml/2006/main">
   <p:cSld>
     <p:bg>
@@ -34453,12 +34489,44 @@
           <a:lstStyle/>
           <a:p>
             <a:r>
+              <a:rPr lang="es-AR" sz="7200" dirty="0" err="1">
+                <a:solidFill>
+                  <a:schemeClr val="bg1"/>
+                </a:solidFill>
+              </a:rPr>
+              <a:t>Objectif</a:t>
+            </a:r>
+            <a:r>
+              <a:rPr lang="es-AR" sz="7200" dirty="0">
+                <a:solidFill>
+                  <a:schemeClr val="bg1"/>
+                </a:solidFill>
+              </a:rPr>
+              <a:t> de </a:t>
+            </a:r>
+            <a:r>
+              <a:rPr lang="es-AR" sz="7200" dirty="0" err="1">
+                <a:solidFill>
+                  <a:schemeClr val="bg1"/>
+                </a:solidFill>
+              </a:rPr>
+              <a:t>l’article</a:t>
+            </a:r>
+            <a:r>
+              <a:rPr lang="es-AR" sz="7200" dirty="0">
+                <a:solidFill>
+                  <a:schemeClr val="bg1"/>
+                </a:solidFill>
+              </a:rPr>
+              <a:t> :</a:t>
+            </a:r>
+            <a:r>
               <a:rPr lang="fr-FR" sz="6800" dirty="0">
                 <a:solidFill>
                   <a:schemeClr val="bg1"/>
                 </a:solidFill>
               </a:rPr>
-              <a:t>Introduction </a:t>
+              <a:t> </a:t>
             </a:r>
             <a:endParaRPr lang="es-AR" sz="6800" dirty="0">
               <a:solidFill>
@@ -34563,43 +34631,6 @@
               <a:buNone/>
             </a:pPr>
             <a:r>
-              <a:rPr lang="es-AR" sz="2000" dirty="0" err="1">
-                <a:solidFill>
-                  <a:schemeClr val="bg1"/>
-                </a:solidFill>
-              </a:rPr>
-              <a:t>Objectif</a:t>
-            </a:r>
-            <a:r>
-              <a:rPr lang="es-AR" sz="2000" dirty="0">
-                <a:solidFill>
-                  <a:schemeClr val="bg1"/>
-                </a:solidFill>
-              </a:rPr>
-              <a:t> de </a:t>
-            </a:r>
-            <a:r>
-              <a:rPr lang="es-AR" sz="2000" dirty="0" err="1">
-                <a:solidFill>
-                  <a:schemeClr val="bg1"/>
-                </a:solidFill>
-              </a:rPr>
-              <a:t>l’article</a:t>
-            </a:r>
-            <a:r>
-              <a:rPr lang="es-AR" sz="2000" dirty="0">
-                <a:solidFill>
-                  <a:schemeClr val="bg1"/>
-                </a:solidFill>
-              </a:rPr>
-              <a:t> :</a:t>
-            </a:r>
-          </a:p>
-          <a:p>
-            <a:pPr marL="0" indent="0">
-              <a:buNone/>
-            </a:pPr>
-            <a:r>
               <a:rPr lang="fr-FR" sz="2000" dirty="0">
                 <a:solidFill>
                   <a:schemeClr val="bg1"/>
@@ -34621,7 +34652,7 @@
                   <a:schemeClr val="bg1"/>
                 </a:solidFill>
               </a:rPr>
-              <a:t> of takeoff à partir de plans 2D et de documentation liées au projet.</a:t>
+              <a:t> takeoff à partir de plans 2D et de documentation liée au projet.</a:t>
             </a:r>
             <a:endParaRPr lang="en-US" sz="2000" dirty="0">
               <a:solidFill>
@@ -34722,7 +34753,7 @@
           </p:nvPr>
         </p:nvPicPr>
         <p:blipFill>
-          <a:blip r:embed="rId2">
+          <a:blip r:embed="rId3">
             <a:extLst>
               <a:ext uri="{28A0092B-C50C-407E-A947-70E740481C1C}">
                 <a14:useLocalDpi xmlns:a14="http://schemas.microsoft.com/office/drawing/2010/main" val="0"/>
@@ -34868,7 +34899,7 @@
           </p:nvPr>
         </p:nvPicPr>
         <p:blipFill>
-          <a:blip r:embed="rId2">
+          <a:blip r:embed="rId3">
             <a:alphaModFix amt="40000"/>
             <a:extLst>
               <a:ext uri="{28A0092B-C50C-407E-A947-70E740481C1C}">
@@ -35237,7 +35268,7 @@
                   <a:schemeClr val="bg1"/>
                 </a:solidFill>
               </a:rPr>
-              <a:t>Sujette</a:t>
+              <a:t>Sujet</a:t>
             </a:r>
             <a:r>
               <a:rPr lang="en-US" sz="2000" dirty="0">
@@ -35690,7 +35721,7 @@
         </p:xfrm>
         <a:graphic>
           <a:graphicData uri="http://schemas.openxmlformats.org/drawingml/2006/diagram">
-            <dgm:relIds xmlns:dgm="http://schemas.openxmlformats.org/drawingml/2006/diagram" xmlns:r="http://schemas.openxmlformats.org/officeDocument/2006/relationships" r:dm="rId2" r:lo="rId3" r:qs="rId4" r:cs="rId5"/>
+            <dgm:relIds xmlns:dgm="http://schemas.openxmlformats.org/drawingml/2006/diagram" xmlns:r="http://schemas.openxmlformats.org/officeDocument/2006/relationships" r:dm="rId3" r:lo="rId4" r:qs="rId5" r:cs="rId6"/>
           </a:graphicData>
         </a:graphic>
       </p:graphicFrame>
@@ -35709,10 +35740,10 @@
           <p:nvPr/>
         </p:nvPicPr>
         <p:blipFill>
-          <a:blip r:embed="rId7">
+          <a:blip r:embed="rId8">
             <a:extLst>
               <a:ext uri="{96DAC541-7B7A-43D3-8B79-37D633B846F1}">
-                <asvg:svgBlip xmlns:asvg="http://schemas.microsoft.com/office/drawing/2016/SVG/main" r:embed="rId8"/>
+                <asvg:svgBlip xmlns:asvg="http://schemas.microsoft.com/office/drawing/2016/SVG/main" r:embed="rId9"/>
               </a:ext>
             </a:extLst>
           </a:blip>
@@ -35745,10 +35776,10 @@
           <p:nvPr/>
         </p:nvPicPr>
         <p:blipFill>
-          <a:blip r:embed="rId9">
+          <a:blip r:embed="rId10">
             <a:extLst>
               <a:ext uri="{96DAC541-7B7A-43D3-8B79-37D633B846F1}">
-                <asvg:svgBlip xmlns:asvg="http://schemas.microsoft.com/office/drawing/2016/SVG/main" r:embed="rId10"/>
+                <asvg:svgBlip xmlns:asvg="http://schemas.microsoft.com/office/drawing/2016/SVG/main" r:embed="rId11"/>
               </a:ext>
             </a:extLst>
           </a:blip>
@@ -36178,7 +36209,7 @@
         </p:xfrm>
         <a:graphic>
           <a:graphicData uri="http://schemas.openxmlformats.org/drawingml/2006/diagram">
-            <dgm:relIds xmlns:dgm="http://schemas.openxmlformats.org/drawingml/2006/diagram" xmlns:r="http://schemas.openxmlformats.org/officeDocument/2006/relationships" r:dm="rId2" r:lo="rId3" r:qs="rId4" r:cs="rId5"/>
+            <dgm:relIds xmlns:dgm="http://schemas.openxmlformats.org/drawingml/2006/diagram" xmlns:r="http://schemas.openxmlformats.org/officeDocument/2006/relationships" r:dm="rId3" r:lo="rId4" r:qs="rId5" r:cs="rId6"/>
           </a:graphicData>
         </a:graphic>
       </p:graphicFrame>
@@ -36388,7 +36419,7 @@
             <p:ph idx="1"/>
             <p:extLst>
               <p:ext uri="{D42A27DB-BD31-4B8C-83A1-F6EECF244321}">
-                <p14:modId xmlns:p14="http://schemas.microsoft.com/office/powerpoint/2010/main" val="3149754022"/>
+                <p14:modId xmlns:p14="http://schemas.microsoft.com/office/powerpoint/2010/main" val="352808692"/>
               </p:ext>
             </p:extLst>
           </p:nvPr>
